--- a/~sasano/lecture/proglang/26/proglang2Ans.pptx
+++ b/~sasano/lecture/proglang/26/proglang2Ans.pptx
@@ -121,6 +121,22 @@
       </a:defRPr>
     </a:lvl9pPr>
   </p:defaultTextStyle>
+  <p:extLst>
+    <p:ext uri="{EFAFB233-063F-42B5-8137-9DF3F51BA10A}">
+      <p15:sldGuideLst xmlns:p15="http://schemas.microsoft.com/office/powerpoint/2012/main">
+        <p15:guide id="1" orient="horz" pos="2160">
+          <p15:clr>
+            <a:srgbClr val="A4A3A4"/>
+          </p15:clr>
+        </p15:guide>
+        <p15:guide id="2" pos="2880">
+          <p15:clr>
+            <a:srgbClr val="A4A3A4"/>
+          </p15:clr>
+        </p15:guide>
+      </p15:sldGuideLst>
+    </p:ext>
+  </p:extLst>
 </p:presentation>
 </file>
 
@@ -207,7 +223,7 @@
             <a:fld id="{7DB51E2A-E8B8-43DF-A077-E5FE9C052AB3}" type="datetimeFigureOut">
               <a:rPr kumimoji="1" lang="ja-JP" altLang="en-US" smtClean="0"/>
               <a:pPr/>
-              <a:t>18/10/10</a:t>
+              <a:t>2026/9/28</a:t>
             </a:fld>
             <a:endParaRPr kumimoji="1" lang="ja-JP" altLang="en-US"/>
           </a:p>
@@ -273,70 +289,69 @@
           <a:p>
             <a:pPr lvl="0"/>
             <a:r>
-              <a:rPr kumimoji="1" lang="ja-JP" altLang="en-US" smtClean="0"/>
+              <a:rPr kumimoji="1" lang="ja-JP" altLang="en-US"/>
               <a:t>マスタ テキストの書式設定</a:t>
             </a:r>
           </a:p>
           <a:p>
             <a:pPr lvl="1"/>
             <a:r>
-              <a:rPr kumimoji="1" lang="ja-JP" altLang="en-US" smtClean="0"/>
+              <a:rPr kumimoji="1" lang="ja-JP" altLang="en-US"/>
               <a:t>第 </a:t>
             </a:r>
             <a:r>
-              <a:rPr kumimoji="1" lang="en-US" altLang="ja-JP" smtClean="0"/>
+              <a:rPr kumimoji="1" lang="en-US" altLang="ja-JP"/>
               <a:t>2 </a:t>
             </a:r>
             <a:r>
-              <a:rPr kumimoji="1" lang="ja-JP" altLang="en-US" smtClean="0"/>
+              <a:rPr kumimoji="1" lang="ja-JP" altLang="en-US"/>
               <a:t>レベル</a:t>
             </a:r>
           </a:p>
           <a:p>
             <a:pPr lvl="2"/>
             <a:r>
-              <a:rPr kumimoji="1" lang="ja-JP" altLang="en-US" smtClean="0"/>
+              <a:rPr kumimoji="1" lang="ja-JP" altLang="en-US"/>
               <a:t>第 </a:t>
             </a:r>
             <a:r>
-              <a:rPr kumimoji="1" lang="en-US" altLang="ja-JP" smtClean="0"/>
+              <a:rPr kumimoji="1" lang="en-US" altLang="ja-JP"/>
               <a:t>3 </a:t>
             </a:r>
             <a:r>
-              <a:rPr kumimoji="1" lang="ja-JP" altLang="en-US" smtClean="0"/>
+              <a:rPr kumimoji="1" lang="ja-JP" altLang="en-US"/>
               <a:t>レベル</a:t>
             </a:r>
           </a:p>
           <a:p>
             <a:pPr lvl="3"/>
             <a:r>
-              <a:rPr kumimoji="1" lang="ja-JP" altLang="en-US" smtClean="0"/>
+              <a:rPr kumimoji="1" lang="ja-JP" altLang="en-US"/>
               <a:t>第 </a:t>
             </a:r>
             <a:r>
-              <a:rPr kumimoji="1" lang="en-US" altLang="ja-JP" smtClean="0"/>
+              <a:rPr kumimoji="1" lang="en-US" altLang="ja-JP"/>
               <a:t>4 </a:t>
             </a:r>
             <a:r>
-              <a:rPr kumimoji="1" lang="ja-JP" altLang="en-US" smtClean="0"/>
+              <a:rPr kumimoji="1" lang="ja-JP" altLang="en-US"/>
               <a:t>レベル</a:t>
             </a:r>
           </a:p>
           <a:p>
             <a:pPr lvl="4"/>
             <a:r>
-              <a:rPr kumimoji="1" lang="ja-JP" altLang="en-US" smtClean="0"/>
+              <a:rPr kumimoji="1" lang="ja-JP" altLang="en-US"/>
               <a:t>第 </a:t>
             </a:r>
             <a:r>
-              <a:rPr kumimoji="1" lang="en-US" altLang="ja-JP" smtClean="0"/>
+              <a:rPr kumimoji="1" lang="en-US" altLang="ja-JP"/>
               <a:t>5 </a:t>
             </a:r>
             <a:r>
-              <a:rPr kumimoji="1" lang="ja-JP" altLang="en-US" smtClean="0"/>
+              <a:rPr kumimoji="1" lang="ja-JP" altLang="en-US"/>
               <a:t>レベル</a:t>
             </a:r>
-            <a:endParaRPr kumimoji="1" lang="ja-JP" altLang="en-US"/>
           </a:p>
         </p:txBody>
       </p:sp>
@@ -630,10 +645,9 @@
           <a:lstStyle/>
           <a:p>
             <a:r>
-              <a:rPr kumimoji="1" lang="ja-JP" altLang="en-US" smtClean="0"/>
+              <a:rPr kumimoji="1" lang="ja-JP" altLang="en-US"/>
               <a:t>マスタ タイトルの書式設定</a:t>
             </a:r>
-            <a:endParaRPr kumimoji="1" lang="ja-JP" altLang="en-US"/>
           </a:p>
         </p:txBody>
       </p:sp>
@@ -749,10 +763,9 @@
           </a:lstStyle>
           <a:p>
             <a:r>
-              <a:rPr kumimoji="1" lang="ja-JP" altLang="en-US" smtClean="0"/>
+              <a:rPr kumimoji="1" lang="ja-JP" altLang="en-US"/>
               <a:t>マスタ サブタイトルの書式設定</a:t>
             </a:r>
-            <a:endParaRPr kumimoji="1" lang="ja-JP" altLang="en-US"/>
           </a:p>
         </p:txBody>
       </p:sp>
@@ -774,7 +787,7 @@
             <a:fld id="{E90ED720-0104-4369-84BC-D37694168613}" type="datetimeFigureOut">
               <a:rPr kumimoji="1" lang="ja-JP" altLang="en-US" smtClean="0"/>
               <a:pPr/>
-              <a:t>18/10/10</a:t>
+              <a:t>2026/9/28</a:t>
             </a:fld>
             <a:endParaRPr kumimoji="1" lang="ja-JP" altLang="en-US"/>
           </a:p>
@@ -864,10 +877,9 @@
           <a:lstStyle/>
           <a:p>
             <a:r>
-              <a:rPr kumimoji="1" lang="ja-JP" altLang="en-US" smtClean="0"/>
+              <a:rPr kumimoji="1" lang="ja-JP" altLang="en-US"/>
               <a:t>マスタ タイトルの書式設定</a:t>
             </a:r>
-            <a:endParaRPr kumimoji="1" lang="ja-JP" altLang="en-US"/>
           </a:p>
         </p:txBody>
       </p:sp>
@@ -888,70 +900,69 @@
           <a:p>
             <a:pPr lvl="0"/>
             <a:r>
-              <a:rPr kumimoji="1" lang="ja-JP" altLang="en-US" smtClean="0"/>
+              <a:rPr kumimoji="1" lang="ja-JP" altLang="en-US"/>
               <a:t>マスタ テキストの書式設定</a:t>
             </a:r>
           </a:p>
           <a:p>
             <a:pPr lvl="1"/>
             <a:r>
-              <a:rPr kumimoji="1" lang="ja-JP" altLang="en-US" smtClean="0"/>
+              <a:rPr kumimoji="1" lang="ja-JP" altLang="en-US"/>
               <a:t>第 </a:t>
             </a:r>
             <a:r>
-              <a:rPr kumimoji="1" lang="en-US" altLang="ja-JP" smtClean="0"/>
+              <a:rPr kumimoji="1" lang="en-US" altLang="ja-JP"/>
               <a:t>2 </a:t>
             </a:r>
             <a:r>
-              <a:rPr kumimoji="1" lang="ja-JP" altLang="en-US" smtClean="0"/>
+              <a:rPr kumimoji="1" lang="ja-JP" altLang="en-US"/>
               <a:t>レベル</a:t>
             </a:r>
           </a:p>
           <a:p>
             <a:pPr lvl="2"/>
             <a:r>
-              <a:rPr kumimoji="1" lang="ja-JP" altLang="en-US" smtClean="0"/>
+              <a:rPr kumimoji="1" lang="ja-JP" altLang="en-US"/>
               <a:t>第 </a:t>
             </a:r>
             <a:r>
-              <a:rPr kumimoji="1" lang="en-US" altLang="ja-JP" smtClean="0"/>
+              <a:rPr kumimoji="1" lang="en-US" altLang="ja-JP"/>
               <a:t>3 </a:t>
             </a:r>
             <a:r>
-              <a:rPr kumimoji="1" lang="ja-JP" altLang="en-US" smtClean="0"/>
+              <a:rPr kumimoji="1" lang="ja-JP" altLang="en-US"/>
               <a:t>レベル</a:t>
             </a:r>
           </a:p>
           <a:p>
             <a:pPr lvl="3"/>
             <a:r>
-              <a:rPr kumimoji="1" lang="ja-JP" altLang="en-US" smtClean="0"/>
+              <a:rPr kumimoji="1" lang="ja-JP" altLang="en-US"/>
               <a:t>第 </a:t>
             </a:r>
             <a:r>
-              <a:rPr kumimoji="1" lang="en-US" altLang="ja-JP" smtClean="0"/>
+              <a:rPr kumimoji="1" lang="en-US" altLang="ja-JP"/>
               <a:t>4 </a:t>
             </a:r>
             <a:r>
-              <a:rPr kumimoji="1" lang="ja-JP" altLang="en-US" smtClean="0"/>
+              <a:rPr kumimoji="1" lang="ja-JP" altLang="en-US"/>
               <a:t>レベル</a:t>
             </a:r>
           </a:p>
           <a:p>
             <a:pPr lvl="4"/>
             <a:r>
-              <a:rPr kumimoji="1" lang="ja-JP" altLang="en-US" smtClean="0"/>
+              <a:rPr kumimoji="1" lang="ja-JP" altLang="en-US"/>
               <a:t>第 </a:t>
             </a:r>
             <a:r>
-              <a:rPr kumimoji="1" lang="en-US" altLang="ja-JP" smtClean="0"/>
+              <a:rPr kumimoji="1" lang="en-US" altLang="ja-JP"/>
               <a:t>5 </a:t>
             </a:r>
             <a:r>
-              <a:rPr kumimoji="1" lang="ja-JP" altLang="en-US" smtClean="0"/>
+              <a:rPr kumimoji="1" lang="ja-JP" altLang="en-US"/>
               <a:t>レベル</a:t>
             </a:r>
-            <a:endParaRPr kumimoji="1" lang="ja-JP" altLang="en-US"/>
           </a:p>
         </p:txBody>
       </p:sp>
@@ -973,7 +984,7 @@
             <a:fld id="{E90ED720-0104-4369-84BC-D37694168613}" type="datetimeFigureOut">
               <a:rPr kumimoji="1" lang="ja-JP" altLang="en-US" smtClean="0"/>
               <a:pPr/>
-              <a:t>18/10/10</a:t>
+              <a:t>2026/9/28</a:t>
             </a:fld>
             <a:endParaRPr kumimoji="1" lang="ja-JP" altLang="en-US"/>
           </a:p>
@@ -1068,10 +1079,9 @@
           <a:lstStyle/>
           <a:p>
             <a:r>
-              <a:rPr kumimoji="1" lang="ja-JP" altLang="en-US" smtClean="0"/>
+              <a:rPr kumimoji="1" lang="ja-JP" altLang="en-US"/>
               <a:t>マスタ タイトルの書式設定</a:t>
             </a:r>
-            <a:endParaRPr kumimoji="1" lang="ja-JP" altLang="en-US"/>
           </a:p>
         </p:txBody>
       </p:sp>
@@ -1097,70 +1107,69 @@
           <a:p>
             <a:pPr lvl="0"/>
             <a:r>
-              <a:rPr kumimoji="1" lang="ja-JP" altLang="en-US" smtClean="0"/>
+              <a:rPr kumimoji="1" lang="ja-JP" altLang="en-US"/>
               <a:t>マスタ テキストの書式設定</a:t>
             </a:r>
           </a:p>
           <a:p>
             <a:pPr lvl="1"/>
             <a:r>
-              <a:rPr kumimoji="1" lang="ja-JP" altLang="en-US" smtClean="0"/>
+              <a:rPr kumimoji="1" lang="ja-JP" altLang="en-US"/>
               <a:t>第 </a:t>
             </a:r>
             <a:r>
-              <a:rPr kumimoji="1" lang="en-US" altLang="ja-JP" smtClean="0"/>
+              <a:rPr kumimoji="1" lang="en-US" altLang="ja-JP"/>
               <a:t>2 </a:t>
             </a:r>
             <a:r>
-              <a:rPr kumimoji="1" lang="ja-JP" altLang="en-US" smtClean="0"/>
+              <a:rPr kumimoji="1" lang="ja-JP" altLang="en-US"/>
               <a:t>レベル</a:t>
             </a:r>
           </a:p>
           <a:p>
             <a:pPr lvl="2"/>
             <a:r>
-              <a:rPr kumimoji="1" lang="ja-JP" altLang="en-US" smtClean="0"/>
+              <a:rPr kumimoji="1" lang="ja-JP" altLang="en-US"/>
               <a:t>第 </a:t>
             </a:r>
             <a:r>
-              <a:rPr kumimoji="1" lang="en-US" altLang="ja-JP" smtClean="0"/>
+              <a:rPr kumimoji="1" lang="en-US" altLang="ja-JP"/>
               <a:t>3 </a:t>
             </a:r>
             <a:r>
-              <a:rPr kumimoji="1" lang="ja-JP" altLang="en-US" smtClean="0"/>
+              <a:rPr kumimoji="1" lang="ja-JP" altLang="en-US"/>
               <a:t>レベル</a:t>
             </a:r>
           </a:p>
           <a:p>
             <a:pPr lvl="3"/>
             <a:r>
-              <a:rPr kumimoji="1" lang="ja-JP" altLang="en-US" smtClean="0"/>
+              <a:rPr kumimoji="1" lang="ja-JP" altLang="en-US"/>
               <a:t>第 </a:t>
             </a:r>
             <a:r>
-              <a:rPr kumimoji="1" lang="en-US" altLang="ja-JP" smtClean="0"/>
+              <a:rPr kumimoji="1" lang="en-US" altLang="ja-JP"/>
               <a:t>4 </a:t>
             </a:r>
             <a:r>
-              <a:rPr kumimoji="1" lang="ja-JP" altLang="en-US" smtClean="0"/>
+              <a:rPr kumimoji="1" lang="ja-JP" altLang="en-US"/>
               <a:t>レベル</a:t>
             </a:r>
           </a:p>
           <a:p>
             <a:pPr lvl="4"/>
             <a:r>
-              <a:rPr kumimoji="1" lang="ja-JP" altLang="en-US" smtClean="0"/>
+              <a:rPr kumimoji="1" lang="ja-JP" altLang="en-US"/>
               <a:t>第 </a:t>
             </a:r>
             <a:r>
-              <a:rPr kumimoji="1" lang="en-US" altLang="ja-JP" smtClean="0"/>
+              <a:rPr kumimoji="1" lang="en-US" altLang="ja-JP"/>
               <a:t>5 </a:t>
             </a:r>
             <a:r>
-              <a:rPr kumimoji="1" lang="ja-JP" altLang="en-US" smtClean="0"/>
+              <a:rPr kumimoji="1" lang="ja-JP" altLang="en-US"/>
               <a:t>レベル</a:t>
             </a:r>
-            <a:endParaRPr kumimoji="1" lang="ja-JP" altLang="en-US"/>
           </a:p>
         </p:txBody>
       </p:sp>
@@ -1182,7 +1191,7 @@
             <a:fld id="{E90ED720-0104-4369-84BC-D37694168613}" type="datetimeFigureOut">
               <a:rPr kumimoji="1" lang="ja-JP" altLang="en-US" smtClean="0"/>
               <a:pPr/>
-              <a:t>18/10/10</a:t>
+              <a:t>2026/9/28</a:t>
             </a:fld>
             <a:endParaRPr kumimoji="1" lang="ja-JP" altLang="en-US"/>
           </a:p>
@@ -1272,10 +1281,9 @@
           <a:lstStyle/>
           <a:p>
             <a:r>
-              <a:rPr kumimoji="1" lang="ja-JP" altLang="en-US" smtClean="0"/>
+              <a:rPr kumimoji="1" lang="ja-JP" altLang="en-US"/>
               <a:t>マスタ タイトルの書式設定</a:t>
             </a:r>
-            <a:endParaRPr kumimoji="1" lang="ja-JP" altLang="en-US"/>
           </a:p>
         </p:txBody>
       </p:sp>
@@ -1296,70 +1304,69 @@
           <a:p>
             <a:pPr lvl="0"/>
             <a:r>
-              <a:rPr kumimoji="1" lang="ja-JP" altLang="en-US" smtClean="0"/>
+              <a:rPr kumimoji="1" lang="ja-JP" altLang="en-US"/>
               <a:t>マスタ テキストの書式設定</a:t>
             </a:r>
           </a:p>
           <a:p>
             <a:pPr lvl="1"/>
             <a:r>
-              <a:rPr kumimoji="1" lang="ja-JP" altLang="en-US" smtClean="0"/>
+              <a:rPr kumimoji="1" lang="ja-JP" altLang="en-US"/>
               <a:t>第 </a:t>
             </a:r>
             <a:r>
-              <a:rPr kumimoji="1" lang="en-US" altLang="ja-JP" smtClean="0"/>
+              <a:rPr kumimoji="1" lang="en-US" altLang="ja-JP"/>
               <a:t>2 </a:t>
             </a:r>
             <a:r>
-              <a:rPr kumimoji="1" lang="ja-JP" altLang="en-US" smtClean="0"/>
+              <a:rPr kumimoji="1" lang="ja-JP" altLang="en-US"/>
               <a:t>レベル</a:t>
             </a:r>
           </a:p>
           <a:p>
             <a:pPr lvl="2"/>
             <a:r>
-              <a:rPr kumimoji="1" lang="ja-JP" altLang="en-US" smtClean="0"/>
+              <a:rPr kumimoji="1" lang="ja-JP" altLang="en-US"/>
               <a:t>第 </a:t>
             </a:r>
             <a:r>
-              <a:rPr kumimoji="1" lang="en-US" altLang="ja-JP" smtClean="0"/>
+              <a:rPr kumimoji="1" lang="en-US" altLang="ja-JP"/>
               <a:t>3 </a:t>
             </a:r>
             <a:r>
-              <a:rPr kumimoji="1" lang="ja-JP" altLang="en-US" smtClean="0"/>
+              <a:rPr kumimoji="1" lang="ja-JP" altLang="en-US"/>
               <a:t>レベル</a:t>
             </a:r>
           </a:p>
           <a:p>
             <a:pPr lvl="3"/>
             <a:r>
-              <a:rPr kumimoji="1" lang="ja-JP" altLang="en-US" smtClean="0"/>
+              <a:rPr kumimoji="1" lang="ja-JP" altLang="en-US"/>
               <a:t>第 </a:t>
             </a:r>
             <a:r>
-              <a:rPr kumimoji="1" lang="en-US" altLang="ja-JP" smtClean="0"/>
+              <a:rPr kumimoji="1" lang="en-US" altLang="ja-JP"/>
               <a:t>4 </a:t>
             </a:r>
             <a:r>
-              <a:rPr kumimoji="1" lang="ja-JP" altLang="en-US" smtClean="0"/>
+              <a:rPr kumimoji="1" lang="ja-JP" altLang="en-US"/>
               <a:t>レベル</a:t>
             </a:r>
           </a:p>
           <a:p>
             <a:pPr lvl="4"/>
             <a:r>
-              <a:rPr kumimoji="1" lang="ja-JP" altLang="en-US" smtClean="0"/>
+              <a:rPr kumimoji="1" lang="ja-JP" altLang="en-US"/>
               <a:t>第 </a:t>
             </a:r>
             <a:r>
-              <a:rPr kumimoji="1" lang="en-US" altLang="ja-JP" smtClean="0"/>
+              <a:rPr kumimoji="1" lang="en-US" altLang="ja-JP"/>
               <a:t>5 </a:t>
             </a:r>
             <a:r>
-              <a:rPr kumimoji="1" lang="ja-JP" altLang="en-US" smtClean="0"/>
+              <a:rPr kumimoji="1" lang="ja-JP" altLang="en-US"/>
               <a:t>レベル</a:t>
             </a:r>
-            <a:endParaRPr kumimoji="1" lang="ja-JP" altLang="en-US"/>
           </a:p>
         </p:txBody>
       </p:sp>
@@ -1381,7 +1388,7 @@
             <a:fld id="{E90ED720-0104-4369-84BC-D37694168613}" type="datetimeFigureOut">
               <a:rPr kumimoji="1" lang="ja-JP" altLang="en-US" smtClean="0"/>
               <a:pPr/>
-              <a:t>18/10/10</a:t>
+              <a:t>2026/9/28</a:t>
             </a:fld>
             <a:endParaRPr kumimoji="1" lang="ja-JP" altLang="en-US"/>
           </a:p>
@@ -1480,10 +1487,9 @@
           </a:lstStyle>
           <a:p>
             <a:r>
-              <a:rPr kumimoji="1" lang="ja-JP" altLang="en-US" smtClean="0"/>
+              <a:rPr kumimoji="1" lang="ja-JP" altLang="en-US"/>
               <a:t>マスタ タイトルの書式設定</a:t>
             </a:r>
-            <a:endParaRPr kumimoji="1" lang="ja-JP" altLang="en-US"/>
           </a:p>
         </p:txBody>
       </p:sp>
@@ -1600,7 +1606,7 @@
           <a:p>
             <a:pPr lvl="0"/>
             <a:r>
-              <a:rPr kumimoji="1" lang="ja-JP" altLang="en-US" smtClean="0"/>
+              <a:rPr kumimoji="1" lang="ja-JP" altLang="en-US"/>
               <a:t>マスタ テキストの書式設定</a:t>
             </a:r>
           </a:p>
@@ -1624,7 +1630,7 @@
             <a:fld id="{E90ED720-0104-4369-84BC-D37694168613}" type="datetimeFigureOut">
               <a:rPr kumimoji="1" lang="ja-JP" altLang="en-US" smtClean="0"/>
               <a:pPr/>
-              <a:t>18/10/10</a:t>
+              <a:t>2026/9/28</a:t>
             </a:fld>
             <a:endParaRPr kumimoji="1" lang="ja-JP" altLang="en-US"/>
           </a:p>
@@ -1714,10 +1720,9 @@
           <a:lstStyle/>
           <a:p>
             <a:r>
-              <a:rPr kumimoji="1" lang="ja-JP" altLang="en-US" smtClean="0"/>
+              <a:rPr kumimoji="1" lang="ja-JP" altLang="en-US"/>
               <a:t>マスタ タイトルの書式設定</a:t>
             </a:r>
-            <a:endParaRPr kumimoji="1" lang="ja-JP" altLang="en-US"/>
           </a:p>
         </p:txBody>
       </p:sp>
@@ -1771,70 +1776,69 @@
           <a:p>
             <a:pPr lvl="0"/>
             <a:r>
-              <a:rPr kumimoji="1" lang="ja-JP" altLang="en-US" smtClean="0"/>
+              <a:rPr kumimoji="1" lang="ja-JP" altLang="en-US"/>
               <a:t>マスタ テキストの書式設定</a:t>
             </a:r>
           </a:p>
           <a:p>
             <a:pPr lvl="1"/>
             <a:r>
-              <a:rPr kumimoji="1" lang="ja-JP" altLang="en-US" smtClean="0"/>
+              <a:rPr kumimoji="1" lang="ja-JP" altLang="en-US"/>
               <a:t>第 </a:t>
             </a:r>
             <a:r>
-              <a:rPr kumimoji="1" lang="en-US" altLang="ja-JP" smtClean="0"/>
+              <a:rPr kumimoji="1" lang="en-US" altLang="ja-JP"/>
               <a:t>2 </a:t>
             </a:r>
             <a:r>
-              <a:rPr kumimoji="1" lang="ja-JP" altLang="en-US" smtClean="0"/>
+              <a:rPr kumimoji="1" lang="ja-JP" altLang="en-US"/>
               <a:t>レベル</a:t>
             </a:r>
           </a:p>
           <a:p>
             <a:pPr lvl="2"/>
             <a:r>
-              <a:rPr kumimoji="1" lang="ja-JP" altLang="en-US" smtClean="0"/>
+              <a:rPr kumimoji="1" lang="ja-JP" altLang="en-US"/>
               <a:t>第 </a:t>
             </a:r>
             <a:r>
-              <a:rPr kumimoji="1" lang="en-US" altLang="ja-JP" smtClean="0"/>
+              <a:rPr kumimoji="1" lang="en-US" altLang="ja-JP"/>
               <a:t>3 </a:t>
             </a:r>
             <a:r>
-              <a:rPr kumimoji="1" lang="ja-JP" altLang="en-US" smtClean="0"/>
+              <a:rPr kumimoji="1" lang="ja-JP" altLang="en-US"/>
               <a:t>レベル</a:t>
             </a:r>
           </a:p>
           <a:p>
             <a:pPr lvl="3"/>
             <a:r>
-              <a:rPr kumimoji="1" lang="ja-JP" altLang="en-US" smtClean="0"/>
+              <a:rPr kumimoji="1" lang="ja-JP" altLang="en-US"/>
               <a:t>第 </a:t>
             </a:r>
             <a:r>
-              <a:rPr kumimoji="1" lang="en-US" altLang="ja-JP" smtClean="0"/>
+              <a:rPr kumimoji="1" lang="en-US" altLang="ja-JP"/>
               <a:t>4 </a:t>
             </a:r>
             <a:r>
-              <a:rPr kumimoji="1" lang="ja-JP" altLang="en-US" smtClean="0"/>
+              <a:rPr kumimoji="1" lang="ja-JP" altLang="en-US"/>
               <a:t>レベル</a:t>
             </a:r>
           </a:p>
           <a:p>
             <a:pPr lvl="4"/>
             <a:r>
-              <a:rPr kumimoji="1" lang="ja-JP" altLang="en-US" smtClean="0"/>
+              <a:rPr kumimoji="1" lang="ja-JP" altLang="en-US"/>
               <a:t>第 </a:t>
             </a:r>
             <a:r>
-              <a:rPr kumimoji="1" lang="en-US" altLang="ja-JP" smtClean="0"/>
+              <a:rPr kumimoji="1" lang="en-US" altLang="ja-JP"/>
               <a:t>5 </a:t>
             </a:r>
             <a:r>
-              <a:rPr kumimoji="1" lang="ja-JP" altLang="en-US" smtClean="0"/>
+              <a:rPr kumimoji="1" lang="ja-JP" altLang="en-US"/>
               <a:t>レベル</a:t>
             </a:r>
-            <a:endParaRPr kumimoji="1" lang="ja-JP" altLang="en-US"/>
           </a:p>
         </p:txBody>
       </p:sp>
@@ -1888,70 +1892,69 @@
           <a:p>
             <a:pPr lvl="0"/>
             <a:r>
-              <a:rPr kumimoji="1" lang="ja-JP" altLang="en-US" smtClean="0"/>
+              <a:rPr kumimoji="1" lang="ja-JP" altLang="en-US"/>
               <a:t>マスタ テキストの書式設定</a:t>
             </a:r>
           </a:p>
           <a:p>
             <a:pPr lvl="1"/>
             <a:r>
-              <a:rPr kumimoji="1" lang="ja-JP" altLang="en-US" smtClean="0"/>
+              <a:rPr kumimoji="1" lang="ja-JP" altLang="en-US"/>
               <a:t>第 </a:t>
             </a:r>
             <a:r>
-              <a:rPr kumimoji="1" lang="en-US" altLang="ja-JP" smtClean="0"/>
+              <a:rPr kumimoji="1" lang="en-US" altLang="ja-JP"/>
               <a:t>2 </a:t>
             </a:r>
             <a:r>
-              <a:rPr kumimoji="1" lang="ja-JP" altLang="en-US" smtClean="0"/>
+              <a:rPr kumimoji="1" lang="ja-JP" altLang="en-US"/>
               <a:t>レベル</a:t>
             </a:r>
           </a:p>
           <a:p>
             <a:pPr lvl="2"/>
             <a:r>
-              <a:rPr kumimoji="1" lang="ja-JP" altLang="en-US" smtClean="0"/>
+              <a:rPr kumimoji="1" lang="ja-JP" altLang="en-US"/>
               <a:t>第 </a:t>
             </a:r>
             <a:r>
-              <a:rPr kumimoji="1" lang="en-US" altLang="ja-JP" smtClean="0"/>
+              <a:rPr kumimoji="1" lang="en-US" altLang="ja-JP"/>
               <a:t>3 </a:t>
             </a:r>
             <a:r>
-              <a:rPr kumimoji="1" lang="ja-JP" altLang="en-US" smtClean="0"/>
+              <a:rPr kumimoji="1" lang="ja-JP" altLang="en-US"/>
               <a:t>レベル</a:t>
             </a:r>
           </a:p>
           <a:p>
             <a:pPr lvl="3"/>
             <a:r>
-              <a:rPr kumimoji="1" lang="ja-JP" altLang="en-US" smtClean="0"/>
+              <a:rPr kumimoji="1" lang="ja-JP" altLang="en-US"/>
               <a:t>第 </a:t>
             </a:r>
             <a:r>
-              <a:rPr kumimoji="1" lang="en-US" altLang="ja-JP" smtClean="0"/>
+              <a:rPr kumimoji="1" lang="en-US" altLang="ja-JP"/>
               <a:t>4 </a:t>
             </a:r>
             <a:r>
-              <a:rPr kumimoji="1" lang="ja-JP" altLang="en-US" smtClean="0"/>
+              <a:rPr kumimoji="1" lang="ja-JP" altLang="en-US"/>
               <a:t>レベル</a:t>
             </a:r>
           </a:p>
           <a:p>
             <a:pPr lvl="4"/>
             <a:r>
-              <a:rPr kumimoji="1" lang="ja-JP" altLang="en-US" smtClean="0"/>
+              <a:rPr kumimoji="1" lang="ja-JP" altLang="en-US"/>
               <a:t>第 </a:t>
             </a:r>
             <a:r>
-              <a:rPr kumimoji="1" lang="en-US" altLang="ja-JP" smtClean="0"/>
+              <a:rPr kumimoji="1" lang="en-US" altLang="ja-JP"/>
               <a:t>5 </a:t>
             </a:r>
             <a:r>
-              <a:rPr kumimoji="1" lang="ja-JP" altLang="en-US" smtClean="0"/>
+              <a:rPr kumimoji="1" lang="ja-JP" altLang="en-US"/>
               <a:t>レベル</a:t>
             </a:r>
-            <a:endParaRPr kumimoji="1" lang="ja-JP" altLang="en-US"/>
           </a:p>
         </p:txBody>
       </p:sp>
@@ -1973,7 +1976,7 @@
             <a:fld id="{E90ED720-0104-4369-84BC-D37694168613}" type="datetimeFigureOut">
               <a:rPr kumimoji="1" lang="ja-JP" altLang="en-US" smtClean="0"/>
               <a:pPr/>
-              <a:t>18/10/10</a:t>
+              <a:t>2026/9/28</a:t>
             </a:fld>
             <a:endParaRPr kumimoji="1" lang="ja-JP" altLang="en-US"/>
           </a:p>
@@ -2067,10 +2070,9 @@
           </a:lstStyle>
           <a:p>
             <a:r>
-              <a:rPr kumimoji="1" lang="ja-JP" altLang="en-US" smtClean="0"/>
+              <a:rPr kumimoji="1" lang="ja-JP" altLang="en-US"/>
               <a:t>マスタ タイトルの書式設定</a:t>
             </a:r>
-            <a:endParaRPr kumimoji="1" lang="ja-JP" altLang="en-US"/>
           </a:p>
         </p:txBody>
       </p:sp>
@@ -2133,7 +2135,7 @@
           <a:p>
             <a:pPr lvl="0"/>
             <a:r>
-              <a:rPr kumimoji="1" lang="ja-JP" altLang="en-US" smtClean="0"/>
+              <a:rPr kumimoji="1" lang="ja-JP" altLang="en-US"/>
               <a:t>マスタ テキストの書式設定</a:t>
             </a:r>
           </a:p>
@@ -2189,70 +2191,69 @@
           <a:p>
             <a:pPr lvl="0"/>
             <a:r>
-              <a:rPr kumimoji="1" lang="ja-JP" altLang="en-US" smtClean="0"/>
+              <a:rPr kumimoji="1" lang="ja-JP" altLang="en-US"/>
               <a:t>マスタ テキストの書式設定</a:t>
             </a:r>
           </a:p>
           <a:p>
             <a:pPr lvl="1"/>
             <a:r>
-              <a:rPr kumimoji="1" lang="ja-JP" altLang="en-US" smtClean="0"/>
+              <a:rPr kumimoji="1" lang="ja-JP" altLang="en-US"/>
               <a:t>第 </a:t>
             </a:r>
             <a:r>
-              <a:rPr kumimoji="1" lang="en-US" altLang="ja-JP" smtClean="0"/>
+              <a:rPr kumimoji="1" lang="en-US" altLang="ja-JP"/>
               <a:t>2 </a:t>
             </a:r>
             <a:r>
-              <a:rPr kumimoji="1" lang="ja-JP" altLang="en-US" smtClean="0"/>
+              <a:rPr kumimoji="1" lang="ja-JP" altLang="en-US"/>
               <a:t>レベル</a:t>
             </a:r>
           </a:p>
           <a:p>
             <a:pPr lvl="2"/>
             <a:r>
-              <a:rPr kumimoji="1" lang="ja-JP" altLang="en-US" smtClean="0"/>
+              <a:rPr kumimoji="1" lang="ja-JP" altLang="en-US"/>
               <a:t>第 </a:t>
             </a:r>
             <a:r>
-              <a:rPr kumimoji="1" lang="en-US" altLang="ja-JP" smtClean="0"/>
+              <a:rPr kumimoji="1" lang="en-US" altLang="ja-JP"/>
               <a:t>3 </a:t>
             </a:r>
             <a:r>
-              <a:rPr kumimoji="1" lang="ja-JP" altLang="en-US" smtClean="0"/>
+              <a:rPr kumimoji="1" lang="ja-JP" altLang="en-US"/>
               <a:t>レベル</a:t>
             </a:r>
           </a:p>
           <a:p>
             <a:pPr lvl="3"/>
             <a:r>
-              <a:rPr kumimoji="1" lang="ja-JP" altLang="en-US" smtClean="0"/>
+              <a:rPr kumimoji="1" lang="ja-JP" altLang="en-US"/>
               <a:t>第 </a:t>
             </a:r>
             <a:r>
-              <a:rPr kumimoji="1" lang="en-US" altLang="ja-JP" smtClean="0"/>
+              <a:rPr kumimoji="1" lang="en-US" altLang="ja-JP"/>
               <a:t>4 </a:t>
             </a:r>
             <a:r>
-              <a:rPr kumimoji="1" lang="ja-JP" altLang="en-US" smtClean="0"/>
+              <a:rPr kumimoji="1" lang="ja-JP" altLang="en-US"/>
               <a:t>レベル</a:t>
             </a:r>
           </a:p>
           <a:p>
             <a:pPr lvl="4"/>
             <a:r>
-              <a:rPr kumimoji="1" lang="ja-JP" altLang="en-US" smtClean="0"/>
+              <a:rPr kumimoji="1" lang="ja-JP" altLang="en-US"/>
               <a:t>第 </a:t>
             </a:r>
             <a:r>
-              <a:rPr kumimoji="1" lang="en-US" altLang="ja-JP" smtClean="0"/>
+              <a:rPr kumimoji="1" lang="en-US" altLang="ja-JP"/>
               <a:t>5 </a:t>
             </a:r>
             <a:r>
-              <a:rPr kumimoji="1" lang="ja-JP" altLang="en-US" smtClean="0"/>
+              <a:rPr kumimoji="1" lang="ja-JP" altLang="en-US"/>
               <a:t>レベル</a:t>
             </a:r>
-            <a:endParaRPr kumimoji="1" lang="ja-JP" altLang="en-US"/>
           </a:p>
         </p:txBody>
       </p:sp>
@@ -2315,7 +2316,7 @@
           <a:p>
             <a:pPr lvl="0"/>
             <a:r>
-              <a:rPr kumimoji="1" lang="ja-JP" altLang="en-US" smtClean="0"/>
+              <a:rPr kumimoji="1" lang="ja-JP" altLang="en-US"/>
               <a:t>マスタ テキストの書式設定</a:t>
             </a:r>
           </a:p>
@@ -2371,70 +2372,69 @@
           <a:p>
             <a:pPr lvl="0"/>
             <a:r>
-              <a:rPr kumimoji="1" lang="ja-JP" altLang="en-US" smtClean="0"/>
+              <a:rPr kumimoji="1" lang="ja-JP" altLang="en-US"/>
               <a:t>マスタ テキストの書式設定</a:t>
             </a:r>
           </a:p>
           <a:p>
             <a:pPr lvl="1"/>
             <a:r>
-              <a:rPr kumimoji="1" lang="ja-JP" altLang="en-US" smtClean="0"/>
+              <a:rPr kumimoji="1" lang="ja-JP" altLang="en-US"/>
               <a:t>第 </a:t>
             </a:r>
             <a:r>
-              <a:rPr kumimoji="1" lang="en-US" altLang="ja-JP" smtClean="0"/>
+              <a:rPr kumimoji="1" lang="en-US" altLang="ja-JP"/>
               <a:t>2 </a:t>
             </a:r>
             <a:r>
-              <a:rPr kumimoji="1" lang="ja-JP" altLang="en-US" smtClean="0"/>
+              <a:rPr kumimoji="1" lang="ja-JP" altLang="en-US"/>
               <a:t>レベル</a:t>
             </a:r>
           </a:p>
           <a:p>
             <a:pPr lvl="2"/>
             <a:r>
-              <a:rPr kumimoji="1" lang="ja-JP" altLang="en-US" smtClean="0"/>
+              <a:rPr kumimoji="1" lang="ja-JP" altLang="en-US"/>
               <a:t>第 </a:t>
             </a:r>
             <a:r>
-              <a:rPr kumimoji="1" lang="en-US" altLang="ja-JP" smtClean="0"/>
+              <a:rPr kumimoji="1" lang="en-US" altLang="ja-JP"/>
               <a:t>3 </a:t>
             </a:r>
             <a:r>
-              <a:rPr kumimoji="1" lang="ja-JP" altLang="en-US" smtClean="0"/>
+              <a:rPr kumimoji="1" lang="ja-JP" altLang="en-US"/>
               <a:t>レベル</a:t>
             </a:r>
           </a:p>
           <a:p>
             <a:pPr lvl="3"/>
             <a:r>
-              <a:rPr kumimoji="1" lang="ja-JP" altLang="en-US" smtClean="0"/>
+              <a:rPr kumimoji="1" lang="ja-JP" altLang="en-US"/>
               <a:t>第 </a:t>
             </a:r>
             <a:r>
-              <a:rPr kumimoji="1" lang="en-US" altLang="ja-JP" smtClean="0"/>
+              <a:rPr kumimoji="1" lang="en-US" altLang="ja-JP"/>
               <a:t>4 </a:t>
             </a:r>
             <a:r>
-              <a:rPr kumimoji="1" lang="ja-JP" altLang="en-US" smtClean="0"/>
+              <a:rPr kumimoji="1" lang="ja-JP" altLang="en-US"/>
               <a:t>レベル</a:t>
             </a:r>
           </a:p>
           <a:p>
             <a:pPr lvl="4"/>
             <a:r>
-              <a:rPr kumimoji="1" lang="ja-JP" altLang="en-US" smtClean="0"/>
+              <a:rPr kumimoji="1" lang="ja-JP" altLang="en-US"/>
               <a:t>第 </a:t>
             </a:r>
             <a:r>
-              <a:rPr kumimoji="1" lang="en-US" altLang="ja-JP" smtClean="0"/>
+              <a:rPr kumimoji="1" lang="en-US" altLang="ja-JP"/>
               <a:t>5 </a:t>
             </a:r>
             <a:r>
-              <a:rPr kumimoji="1" lang="ja-JP" altLang="en-US" smtClean="0"/>
+              <a:rPr kumimoji="1" lang="ja-JP" altLang="en-US"/>
               <a:t>レベル</a:t>
             </a:r>
-            <a:endParaRPr kumimoji="1" lang="ja-JP" altLang="en-US"/>
           </a:p>
         </p:txBody>
       </p:sp>
@@ -2456,7 +2456,7 @@
             <a:fld id="{E90ED720-0104-4369-84BC-D37694168613}" type="datetimeFigureOut">
               <a:rPr kumimoji="1" lang="ja-JP" altLang="en-US" smtClean="0"/>
               <a:pPr/>
-              <a:t>18/10/10</a:t>
+              <a:t>2026/9/28</a:t>
             </a:fld>
             <a:endParaRPr kumimoji="1" lang="ja-JP" altLang="en-US"/>
           </a:p>
@@ -2546,10 +2546,9 @@
           <a:lstStyle/>
           <a:p>
             <a:r>
-              <a:rPr kumimoji="1" lang="ja-JP" altLang="en-US" smtClean="0"/>
+              <a:rPr kumimoji="1" lang="ja-JP" altLang="en-US"/>
               <a:t>マスタ タイトルの書式設定</a:t>
             </a:r>
-            <a:endParaRPr kumimoji="1" lang="ja-JP" altLang="en-US"/>
           </a:p>
         </p:txBody>
       </p:sp>
@@ -2571,7 +2570,7 @@
             <a:fld id="{E90ED720-0104-4369-84BC-D37694168613}" type="datetimeFigureOut">
               <a:rPr kumimoji="1" lang="ja-JP" altLang="en-US" smtClean="0"/>
               <a:pPr/>
-              <a:t>18/10/10</a:t>
+              <a:t>2026/9/28</a:t>
             </a:fld>
             <a:endParaRPr kumimoji="1" lang="ja-JP" altLang="en-US"/>
           </a:p>
@@ -2663,7 +2662,7 @@
             <a:fld id="{E90ED720-0104-4369-84BC-D37694168613}" type="datetimeFigureOut">
               <a:rPr kumimoji="1" lang="ja-JP" altLang="en-US" smtClean="0"/>
               <a:pPr/>
-              <a:t>18/10/10</a:t>
+              <a:t>2026/9/28</a:t>
             </a:fld>
             <a:endParaRPr kumimoji="1" lang="ja-JP" altLang="en-US"/>
           </a:p>
@@ -2762,10 +2761,9 @@
           </a:lstStyle>
           <a:p>
             <a:r>
-              <a:rPr kumimoji="1" lang="ja-JP" altLang="en-US" smtClean="0"/>
+              <a:rPr kumimoji="1" lang="ja-JP" altLang="en-US"/>
               <a:t>マスタ タイトルの書式設定</a:t>
             </a:r>
-            <a:endParaRPr kumimoji="1" lang="ja-JP" altLang="en-US"/>
           </a:p>
         </p:txBody>
       </p:sp>
@@ -2819,70 +2817,69 @@
           <a:p>
             <a:pPr lvl="0"/>
             <a:r>
-              <a:rPr kumimoji="1" lang="ja-JP" altLang="en-US" smtClean="0"/>
+              <a:rPr kumimoji="1" lang="ja-JP" altLang="en-US"/>
               <a:t>マスタ テキストの書式設定</a:t>
             </a:r>
           </a:p>
           <a:p>
             <a:pPr lvl="1"/>
             <a:r>
-              <a:rPr kumimoji="1" lang="ja-JP" altLang="en-US" smtClean="0"/>
+              <a:rPr kumimoji="1" lang="ja-JP" altLang="en-US"/>
               <a:t>第 </a:t>
             </a:r>
             <a:r>
-              <a:rPr kumimoji="1" lang="en-US" altLang="ja-JP" smtClean="0"/>
+              <a:rPr kumimoji="1" lang="en-US" altLang="ja-JP"/>
               <a:t>2 </a:t>
             </a:r>
             <a:r>
-              <a:rPr kumimoji="1" lang="ja-JP" altLang="en-US" smtClean="0"/>
+              <a:rPr kumimoji="1" lang="ja-JP" altLang="en-US"/>
               <a:t>レベル</a:t>
             </a:r>
           </a:p>
           <a:p>
             <a:pPr lvl="2"/>
             <a:r>
-              <a:rPr kumimoji="1" lang="ja-JP" altLang="en-US" smtClean="0"/>
+              <a:rPr kumimoji="1" lang="ja-JP" altLang="en-US"/>
               <a:t>第 </a:t>
             </a:r>
             <a:r>
-              <a:rPr kumimoji="1" lang="en-US" altLang="ja-JP" smtClean="0"/>
+              <a:rPr kumimoji="1" lang="en-US" altLang="ja-JP"/>
               <a:t>3 </a:t>
             </a:r>
             <a:r>
-              <a:rPr kumimoji="1" lang="ja-JP" altLang="en-US" smtClean="0"/>
+              <a:rPr kumimoji="1" lang="ja-JP" altLang="en-US"/>
               <a:t>レベル</a:t>
             </a:r>
           </a:p>
           <a:p>
             <a:pPr lvl="3"/>
             <a:r>
-              <a:rPr kumimoji="1" lang="ja-JP" altLang="en-US" smtClean="0"/>
+              <a:rPr kumimoji="1" lang="ja-JP" altLang="en-US"/>
               <a:t>第 </a:t>
             </a:r>
             <a:r>
-              <a:rPr kumimoji="1" lang="en-US" altLang="ja-JP" smtClean="0"/>
+              <a:rPr kumimoji="1" lang="en-US" altLang="ja-JP"/>
               <a:t>4 </a:t>
             </a:r>
             <a:r>
-              <a:rPr kumimoji="1" lang="ja-JP" altLang="en-US" smtClean="0"/>
+              <a:rPr kumimoji="1" lang="ja-JP" altLang="en-US"/>
               <a:t>レベル</a:t>
             </a:r>
           </a:p>
           <a:p>
             <a:pPr lvl="4"/>
             <a:r>
-              <a:rPr kumimoji="1" lang="ja-JP" altLang="en-US" smtClean="0"/>
+              <a:rPr kumimoji="1" lang="ja-JP" altLang="en-US"/>
               <a:t>第 </a:t>
             </a:r>
             <a:r>
-              <a:rPr kumimoji="1" lang="en-US" altLang="ja-JP" smtClean="0"/>
+              <a:rPr kumimoji="1" lang="en-US" altLang="ja-JP"/>
               <a:t>5 </a:t>
             </a:r>
             <a:r>
-              <a:rPr kumimoji="1" lang="ja-JP" altLang="en-US" smtClean="0"/>
+              <a:rPr kumimoji="1" lang="ja-JP" altLang="en-US"/>
               <a:t>レベル</a:t>
             </a:r>
-            <a:endParaRPr kumimoji="1" lang="ja-JP" altLang="en-US"/>
           </a:p>
         </p:txBody>
       </p:sp>
@@ -2945,7 +2942,7 @@
           <a:p>
             <a:pPr lvl="0"/>
             <a:r>
-              <a:rPr kumimoji="1" lang="ja-JP" altLang="en-US" smtClean="0"/>
+              <a:rPr kumimoji="1" lang="ja-JP" altLang="en-US"/>
               <a:t>マスタ テキストの書式設定</a:t>
             </a:r>
           </a:p>
@@ -2969,7 +2966,7 @@
             <a:fld id="{E90ED720-0104-4369-84BC-D37694168613}" type="datetimeFigureOut">
               <a:rPr kumimoji="1" lang="ja-JP" altLang="en-US" smtClean="0"/>
               <a:pPr/>
-              <a:t>18/10/10</a:t>
+              <a:t>2026/9/28</a:t>
             </a:fld>
             <a:endParaRPr kumimoji="1" lang="ja-JP" altLang="en-US"/>
           </a:p>
@@ -3068,10 +3065,9 @@
           </a:lstStyle>
           <a:p>
             <a:r>
-              <a:rPr kumimoji="1" lang="ja-JP" altLang="en-US" smtClean="0"/>
+              <a:rPr kumimoji="1" lang="ja-JP" altLang="en-US"/>
               <a:t>マスタ タイトルの書式設定</a:t>
             </a:r>
-            <a:endParaRPr kumimoji="1" lang="ja-JP" altLang="en-US"/>
           </a:p>
         </p:txBody>
       </p:sp>
@@ -3195,7 +3191,7 @@
           <a:p>
             <a:pPr lvl="0"/>
             <a:r>
-              <a:rPr kumimoji="1" lang="ja-JP" altLang="en-US" smtClean="0"/>
+              <a:rPr kumimoji="1" lang="ja-JP" altLang="en-US"/>
               <a:t>マスタ テキストの書式設定</a:t>
             </a:r>
           </a:p>
@@ -3219,7 +3215,7 @@
             <a:fld id="{E90ED720-0104-4369-84BC-D37694168613}" type="datetimeFigureOut">
               <a:rPr kumimoji="1" lang="ja-JP" altLang="en-US" smtClean="0"/>
               <a:pPr/>
-              <a:t>18/10/10</a:t>
+              <a:t>2026/9/28</a:t>
             </a:fld>
             <a:endParaRPr kumimoji="1" lang="ja-JP" altLang="en-US"/>
           </a:p>
@@ -3324,10 +3320,9 @@
           <a:lstStyle/>
           <a:p>
             <a:r>
-              <a:rPr kumimoji="1" lang="ja-JP" altLang="en-US" smtClean="0"/>
+              <a:rPr kumimoji="1" lang="ja-JP" altLang="en-US"/>
               <a:t>マスタ タイトルの書式設定</a:t>
             </a:r>
-            <a:endParaRPr kumimoji="1" lang="ja-JP" altLang="en-US"/>
           </a:p>
         </p:txBody>
       </p:sp>
@@ -3358,70 +3353,69 @@
           <a:p>
             <a:pPr lvl="0"/>
             <a:r>
-              <a:rPr kumimoji="1" lang="ja-JP" altLang="en-US" smtClean="0"/>
+              <a:rPr kumimoji="1" lang="ja-JP" altLang="en-US"/>
               <a:t>マスタ テキストの書式設定</a:t>
             </a:r>
           </a:p>
           <a:p>
             <a:pPr lvl="1"/>
             <a:r>
-              <a:rPr kumimoji="1" lang="ja-JP" altLang="en-US" smtClean="0"/>
+              <a:rPr kumimoji="1" lang="ja-JP" altLang="en-US"/>
               <a:t>第 </a:t>
             </a:r>
             <a:r>
-              <a:rPr kumimoji="1" lang="en-US" altLang="ja-JP" smtClean="0"/>
+              <a:rPr kumimoji="1" lang="en-US" altLang="ja-JP"/>
               <a:t>2 </a:t>
             </a:r>
             <a:r>
-              <a:rPr kumimoji="1" lang="ja-JP" altLang="en-US" smtClean="0"/>
+              <a:rPr kumimoji="1" lang="ja-JP" altLang="en-US"/>
               <a:t>レベル</a:t>
             </a:r>
           </a:p>
           <a:p>
             <a:pPr lvl="2"/>
             <a:r>
-              <a:rPr kumimoji="1" lang="ja-JP" altLang="en-US" smtClean="0"/>
+              <a:rPr kumimoji="1" lang="ja-JP" altLang="en-US"/>
               <a:t>第 </a:t>
             </a:r>
             <a:r>
-              <a:rPr kumimoji="1" lang="en-US" altLang="ja-JP" smtClean="0"/>
+              <a:rPr kumimoji="1" lang="en-US" altLang="ja-JP"/>
               <a:t>3 </a:t>
             </a:r>
             <a:r>
-              <a:rPr kumimoji="1" lang="ja-JP" altLang="en-US" smtClean="0"/>
+              <a:rPr kumimoji="1" lang="ja-JP" altLang="en-US"/>
               <a:t>レベル</a:t>
             </a:r>
           </a:p>
           <a:p>
             <a:pPr lvl="3"/>
             <a:r>
-              <a:rPr kumimoji="1" lang="ja-JP" altLang="en-US" smtClean="0"/>
+              <a:rPr kumimoji="1" lang="ja-JP" altLang="en-US"/>
               <a:t>第 </a:t>
             </a:r>
             <a:r>
-              <a:rPr kumimoji="1" lang="en-US" altLang="ja-JP" smtClean="0"/>
+              <a:rPr kumimoji="1" lang="en-US" altLang="ja-JP"/>
               <a:t>4 </a:t>
             </a:r>
             <a:r>
-              <a:rPr kumimoji="1" lang="ja-JP" altLang="en-US" smtClean="0"/>
+              <a:rPr kumimoji="1" lang="ja-JP" altLang="en-US"/>
               <a:t>レベル</a:t>
             </a:r>
           </a:p>
           <a:p>
             <a:pPr lvl="4"/>
             <a:r>
-              <a:rPr kumimoji="1" lang="ja-JP" altLang="en-US" smtClean="0"/>
+              <a:rPr kumimoji="1" lang="ja-JP" altLang="en-US"/>
               <a:t>第 </a:t>
             </a:r>
             <a:r>
-              <a:rPr kumimoji="1" lang="en-US" altLang="ja-JP" smtClean="0"/>
+              <a:rPr kumimoji="1" lang="en-US" altLang="ja-JP"/>
               <a:t>5 </a:t>
             </a:r>
             <a:r>
-              <a:rPr kumimoji="1" lang="ja-JP" altLang="en-US" smtClean="0"/>
+              <a:rPr kumimoji="1" lang="ja-JP" altLang="en-US"/>
               <a:t>レベル</a:t>
             </a:r>
-            <a:endParaRPr kumimoji="1" lang="ja-JP" altLang="en-US"/>
           </a:p>
         </p:txBody>
       </p:sp>
@@ -3461,7 +3455,7 @@
             <a:fld id="{E90ED720-0104-4369-84BC-D37694168613}" type="datetimeFigureOut">
               <a:rPr kumimoji="1" lang="ja-JP" altLang="en-US" smtClean="0"/>
               <a:pPr/>
-              <a:t>18/10/10</a:t>
+              <a:t>2026/9/28</a:t>
             </a:fld>
             <a:endParaRPr kumimoji="1" lang="ja-JP" altLang="en-US"/>
           </a:p>
@@ -3855,29 +3849,21 @@
           <a:lstStyle/>
           <a:p>
             <a:r>
-              <a:rPr kumimoji="1" lang="ja-JP" altLang="en-US" dirty="0" smtClean="0"/>
+              <a:rPr kumimoji="1" lang="ja-JP" altLang="en-US" dirty="0"/>
               <a:t>プログラミング言語論</a:t>
             </a:r>
-            <a:r>
-              <a:rPr kumimoji="1" lang="en-US" altLang="ja-JP" dirty="0" smtClean="0"/>
-              <a:t/>
-            </a:r>
             <a:br>
-              <a:rPr kumimoji="1" lang="en-US" altLang="ja-JP" dirty="0" smtClean="0"/>
+              <a:rPr kumimoji="1" lang="en-US" altLang="ja-JP" dirty="0"/>
             </a:br>
             <a:r>
-              <a:rPr lang="ja-JP" altLang="en-US" dirty="0" smtClean="0"/>
+              <a:rPr lang="ja-JP" altLang="en-US" dirty="0"/>
               <a:t>第２回</a:t>
-            </a:r>
-            <a:r>
-              <a:rPr lang="en-US" altLang="ja-JP" dirty="0"/>
-              <a:t/>
             </a:r>
             <a:br>
               <a:rPr lang="en-US" altLang="ja-JP" dirty="0"/>
             </a:br>
             <a:r>
-              <a:rPr lang="ja-JP" altLang="en-US" dirty="0" smtClean="0"/>
+              <a:rPr lang="ja-JP" altLang="en-US" dirty="0"/>
               <a:t>練習問題解答例</a:t>
             </a:r>
             <a:endParaRPr kumimoji="1" lang="ja-JP" altLang="en-US" dirty="0"/>
@@ -3892,7 +3878,7 @@
         </p:nvSpPr>
         <p:spPr>
           <a:xfrm>
-            <a:off x="2497797" y="5107071"/>
+            <a:off x="2385214" y="5143512"/>
             <a:ext cx="4373572" cy="523220"/>
           </a:xfrm>
           <a:prstGeom prst="rect">
@@ -3906,11 +3892,15 @@
           </a:bodyPr>
           <a:lstStyle/>
           <a:p>
-            <a:r>
-              <a:rPr kumimoji="1" lang="ja-JP" altLang="en-US" sz="2800" dirty="0" smtClean="0"/>
-              <a:t>情報工学科   篠埜　功</a:t>
-            </a:r>
-            <a:endParaRPr kumimoji="1" lang="ja-JP" altLang="en-US" sz="2800" dirty="0"/>
+            <a:pPr algn="ctr"/>
+            <a:r>
+              <a:rPr kumimoji="1" lang="ja-JP" altLang="en-US" sz="2800"/>
+              <a:t>篠埜　</a:t>
+            </a:r>
+            <a:r>
+              <a:rPr kumimoji="1" lang="ja-JP" altLang="en-US" sz="2800" dirty="0"/>
+              <a:t>功</a:t>
+            </a:r>
           </a:p>
         </p:txBody>
       </p:sp>
@@ -3962,16 +3952,8 @@
           <a:lstStyle/>
           <a:p>
             <a:r>
-              <a:rPr lang="ja-JP" altLang="en-US" sz="4000" dirty="0" smtClean="0"/>
-              <a:t>練習</a:t>
-            </a:r>
-            <a:r>
-              <a:rPr lang="ja-JP" altLang="en-US" sz="4000" dirty="0" smtClean="0"/>
-              <a:t>問題</a:t>
-            </a:r>
-            <a:r>
-              <a:rPr lang="ja-JP" altLang="en-US" sz="4000" dirty="0" smtClean="0"/>
-              <a:t>５</a:t>
+              <a:rPr lang="ja-JP" altLang="en-US" sz="4000" dirty="0"/>
+              <a:t>練習問題５</a:t>
             </a:r>
             <a:endParaRPr kumimoji="1" lang="ja-JP" altLang="en-US" sz="4000" dirty="0"/>
           </a:p>
@@ -4000,157 +3982,157 @@
           <a:lstStyle/>
           <a:p>
             <a:r>
-              <a:rPr lang="ja-JP" altLang="en-US" sz="2800" dirty="0" smtClean="0"/>
+              <a:rPr lang="ja-JP" altLang="en-US" sz="2800" dirty="0"/>
               <a:t>以下のプログラム断片の制御フローを図示せよ。</a:t>
             </a:r>
-            <a:endParaRPr lang="en-US" altLang="ja-JP" sz="2800" dirty="0" smtClean="0"/>
-          </a:p>
-          <a:p>
-            <a:r>
-              <a:rPr lang="en-US" altLang="ja-JP" sz="2800" b="1" dirty="0" smtClean="0"/>
+            <a:endParaRPr lang="en-US" altLang="ja-JP" sz="2800" dirty="0"/>
+          </a:p>
+          <a:p>
+            <a:r>
+              <a:rPr lang="en-US" altLang="ja-JP" sz="2800" b="1" dirty="0"/>
               <a:t>while</a:t>
             </a:r>
             <a:r>
-              <a:rPr lang="en-US" altLang="ja-JP" sz="2800" dirty="0" smtClean="0"/>
+              <a:rPr lang="en-US" altLang="ja-JP" sz="2800" dirty="0"/>
               <a:t> x&gt;0 </a:t>
             </a:r>
             <a:r>
-              <a:rPr lang="en-US" altLang="ja-JP" sz="2800" b="1" dirty="0" smtClean="0"/>
+              <a:rPr lang="en-US" altLang="ja-JP" sz="2800" b="1" dirty="0"/>
               <a:t>do</a:t>
             </a:r>
           </a:p>
           <a:p>
             <a:r>
-              <a:rPr lang="en-US" altLang="ja-JP" sz="2800" b="1" dirty="0" smtClean="0"/>
+              <a:rPr lang="en-US" altLang="ja-JP" sz="2800" b="1" dirty="0"/>
               <a:t>    begin</a:t>
             </a:r>
           </a:p>
           <a:p>
             <a:r>
-              <a:rPr lang="en-US" altLang="ja-JP" sz="2800" b="1" dirty="0" smtClean="0"/>
+              <a:rPr lang="en-US" altLang="ja-JP" sz="2800" b="1" dirty="0"/>
               <a:t>        while </a:t>
             </a:r>
             <a:r>
-              <a:rPr lang="en-US" altLang="ja-JP" sz="2800" dirty="0" smtClean="0"/>
+              <a:rPr lang="en-US" altLang="ja-JP" sz="2800" dirty="0"/>
               <a:t>y&gt;0</a:t>
             </a:r>
             <a:r>
-              <a:rPr lang="en-US" altLang="ja-JP" sz="2800" b="1" dirty="0" smtClean="0"/>
+              <a:rPr lang="en-US" altLang="ja-JP" sz="2800" b="1" dirty="0"/>
               <a:t> do</a:t>
             </a:r>
           </a:p>
           <a:p>
             <a:r>
-              <a:rPr lang="en-US" altLang="ja-JP" sz="2800" dirty="0" smtClean="0"/>
+              <a:rPr lang="en-US" altLang="ja-JP" sz="2800" dirty="0"/>
               <a:t>            </a:t>
             </a:r>
             <a:r>
-              <a:rPr lang="en-US" altLang="ja-JP" sz="2800" b="1" dirty="0" smtClean="0"/>
+              <a:rPr lang="en-US" altLang="ja-JP" sz="2800" b="1" dirty="0"/>
               <a:t>begin</a:t>
             </a:r>
           </a:p>
           <a:p>
             <a:r>
-              <a:rPr lang="en-US" altLang="ja-JP" sz="2800" dirty="0" smtClean="0"/>
+              <a:rPr lang="en-US" altLang="ja-JP" sz="2800" dirty="0"/>
               <a:t>                </a:t>
             </a:r>
             <a:r>
-              <a:rPr lang="en-US" altLang="ja-JP" sz="2800" b="1" dirty="0" smtClean="0"/>
+              <a:rPr lang="en-US" altLang="ja-JP" sz="2800" b="1" dirty="0"/>
               <a:t>if</a:t>
             </a:r>
             <a:r>
-              <a:rPr lang="en-US" altLang="ja-JP" sz="2800" dirty="0" smtClean="0"/>
+              <a:rPr lang="en-US" altLang="ja-JP" sz="2800" dirty="0"/>
               <a:t> x</a:t>
             </a:r>
             <a:r>
-              <a:rPr lang="en-US" altLang="ja-JP" sz="2800" dirty="0" smtClean="0">
+              <a:rPr lang="en-US" altLang="ja-JP" sz="2800" dirty="0">
                 <a:sym typeface="Symbol"/>
               </a:rPr>
               <a:t></a:t>
             </a:r>
             <a:r>
-              <a:rPr lang="en-US" altLang="ja-JP" sz="2800" dirty="0" smtClean="0"/>
+              <a:rPr lang="en-US" altLang="ja-JP" sz="2800" dirty="0"/>
               <a:t>3 </a:t>
             </a:r>
             <a:r>
-              <a:rPr lang="en-US" altLang="ja-JP" sz="2800" b="1" dirty="0" smtClean="0"/>
+              <a:rPr lang="en-US" altLang="ja-JP" sz="2800" b="1" dirty="0"/>
               <a:t>then</a:t>
             </a:r>
           </a:p>
           <a:p>
             <a:r>
-              <a:rPr lang="en-US" altLang="ja-JP" sz="2800" b="1" dirty="0" smtClean="0"/>
+              <a:rPr lang="en-US" altLang="ja-JP" sz="2800" b="1" dirty="0"/>
               <a:t>                    begin</a:t>
             </a:r>
           </a:p>
           <a:p>
             <a:r>
-              <a:rPr lang="en-US" altLang="ja-JP" sz="2800" b="1" dirty="0" smtClean="0"/>
+              <a:rPr lang="en-US" altLang="ja-JP" sz="2800" b="1" dirty="0"/>
               <a:t>                        </a:t>
             </a:r>
             <a:r>
-              <a:rPr lang="en-US" altLang="ja-JP" sz="2800" dirty="0" smtClean="0"/>
+              <a:rPr lang="en-US" altLang="ja-JP" sz="2800" dirty="0"/>
               <a:t>y := y – 1;</a:t>
             </a:r>
           </a:p>
           <a:p>
             <a:r>
-              <a:rPr kumimoji="1" lang="en-US" altLang="ja-JP" sz="2800" dirty="0" smtClean="0"/>
+              <a:rPr kumimoji="1" lang="en-US" altLang="ja-JP" sz="2800" dirty="0"/>
               <a:t>                        </a:t>
             </a:r>
             <a:r>
-              <a:rPr kumimoji="1" lang="en-US" altLang="ja-JP" sz="2800" b="1" dirty="0" smtClean="0"/>
+              <a:rPr kumimoji="1" lang="en-US" altLang="ja-JP" sz="2800" b="1" dirty="0"/>
               <a:t>continue</a:t>
             </a:r>
           </a:p>
           <a:p>
             <a:r>
-              <a:rPr lang="en-US" altLang="ja-JP" sz="2800" b="1" dirty="0" smtClean="0"/>
+              <a:rPr lang="en-US" altLang="ja-JP" sz="2800" b="1" dirty="0"/>
               <a:t>                    end</a:t>
             </a:r>
-            <a:endParaRPr kumimoji="1" lang="en-US" altLang="ja-JP" sz="2800" dirty="0" smtClean="0"/>
-          </a:p>
-          <a:p>
-            <a:r>
-              <a:rPr lang="en-US" altLang="ja-JP" sz="2800" b="1" dirty="0" smtClean="0"/>
+            <a:endParaRPr kumimoji="1" lang="en-US" altLang="ja-JP" sz="2800" dirty="0"/>
+          </a:p>
+          <a:p>
+            <a:r>
+              <a:rPr lang="en-US" altLang="ja-JP" sz="2800" b="1" dirty="0"/>
               <a:t>                </a:t>
             </a:r>
             <a:r>
-              <a:rPr lang="en-US" altLang="ja-JP" sz="2800" dirty="0" smtClean="0"/>
+              <a:rPr lang="en-US" altLang="ja-JP" sz="2800" dirty="0"/>
               <a:t>z := z + 1;</a:t>
             </a:r>
             <a:r>
-              <a:rPr kumimoji="1" lang="en-US" altLang="ja-JP" sz="2800" dirty="0" smtClean="0"/>
+              <a:rPr kumimoji="1" lang="en-US" altLang="ja-JP" sz="2800" dirty="0"/>
               <a:t>  y := y - 1</a:t>
             </a:r>
           </a:p>
           <a:p>
             <a:r>
-              <a:rPr kumimoji="1" lang="en-US" altLang="ja-JP" sz="2800" dirty="0" smtClean="0"/>
+              <a:rPr kumimoji="1" lang="en-US" altLang="ja-JP" sz="2800" dirty="0"/>
               <a:t>            </a:t>
             </a:r>
             <a:r>
-              <a:rPr kumimoji="1" lang="en-US" altLang="ja-JP" sz="2800" b="1" dirty="0" smtClean="0"/>
+              <a:rPr kumimoji="1" lang="en-US" altLang="ja-JP" sz="2800" b="1" dirty="0"/>
               <a:t>end</a:t>
             </a:r>
             <a:r>
-              <a:rPr kumimoji="1" lang="en-US" altLang="ja-JP" sz="2800" dirty="0" smtClean="0"/>
+              <a:rPr kumimoji="1" lang="en-US" altLang="ja-JP" sz="2800" dirty="0"/>
               <a:t>;</a:t>
             </a:r>
           </a:p>
           <a:p>
             <a:r>
-              <a:rPr kumimoji="1" lang="en-US" altLang="ja-JP" sz="2800" dirty="0" smtClean="0"/>
+              <a:rPr kumimoji="1" lang="en-US" altLang="ja-JP" sz="2800" dirty="0"/>
               <a:t>        x := x – 1</a:t>
             </a:r>
           </a:p>
           <a:p>
             <a:r>
-              <a:rPr lang="en-US" altLang="ja-JP" sz="2800" dirty="0" smtClean="0"/>
+              <a:rPr lang="en-US" altLang="ja-JP" sz="2800" dirty="0"/>
               <a:t>   </a:t>
             </a:r>
             <a:r>
-              <a:rPr lang="en-US" altLang="ja-JP" sz="2800" b="1" dirty="0" smtClean="0"/>
+              <a:rPr lang="en-US" altLang="ja-JP" sz="2800" b="1" dirty="0"/>
               <a:t> end</a:t>
             </a:r>
             <a:endParaRPr kumimoji="1" lang="ja-JP" altLang="en-US" sz="2800" b="1" dirty="0"/>
@@ -4225,7 +4207,7 @@
           <a:p>
             <a:pPr algn="ctr"/>
             <a:r>
-              <a:rPr lang="en-US" altLang="ja-JP" sz="2800" dirty="0" smtClean="0">
+              <a:rPr lang="en-US" altLang="ja-JP" sz="2800" dirty="0">
                 <a:solidFill>
                   <a:schemeClr val="tx1"/>
                 </a:solidFill>
@@ -4299,7 +4281,7 @@
           <a:lstStyle/>
           <a:p>
             <a:r>
-              <a:rPr kumimoji="1" lang="en-US" altLang="ja-JP" sz="2800" dirty="0" smtClean="0"/>
+              <a:rPr kumimoji="1" lang="en-US" altLang="ja-JP" sz="2800" dirty="0"/>
               <a:t>T</a:t>
             </a:r>
             <a:endParaRPr kumimoji="1" lang="ja-JP" altLang="en-US" sz="2800" dirty="0"/>
@@ -4329,7 +4311,7 @@
           <a:lstStyle/>
           <a:p>
             <a:r>
-              <a:rPr kumimoji="1" lang="en-US" altLang="ja-JP" sz="2800" dirty="0" smtClean="0"/>
+              <a:rPr kumimoji="1" lang="en-US" altLang="ja-JP" sz="2800" dirty="0"/>
               <a:t>F</a:t>
             </a:r>
             <a:endParaRPr kumimoji="1" lang="ja-JP" altLang="en-US" sz="2800" dirty="0"/>
@@ -4359,7 +4341,7 @@
           <a:lstStyle/>
           <a:p>
             <a:r>
-              <a:rPr lang="en-US" altLang="ja-JP" sz="2800" dirty="0" smtClean="0"/>
+              <a:rPr lang="en-US" altLang="ja-JP" sz="2800" dirty="0"/>
               <a:t>  x := x-1</a:t>
             </a:r>
           </a:p>
@@ -4461,7 +4443,7 @@
           <a:lstStyle/>
           <a:p>
             <a:r>
-              <a:rPr lang="ja-JP" altLang="en-US" dirty="0" smtClean="0"/>
+              <a:rPr lang="ja-JP" altLang="en-US" dirty="0"/>
               <a:t>解答例</a:t>
             </a:r>
             <a:endParaRPr kumimoji="1" lang="ja-JP" altLang="en-US" dirty="0"/>
@@ -4511,7 +4493,7 @@
           <a:p>
             <a:pPr algn="ctr"/>
             <a:r>
-              <a:rPr kumimoji="1" lang="en-US" altLang="ja-JP" sz="2800" dirty="0" smtClean="0">
+              <a:rPr kumimoji="1" lang="en-US" altLang="ja-JP" sz="2800" dirty="0">
                 <a:solidFill>
                   <a:schemeClr val="tx1"/>
                 </a:solidFill>
@@ -4549,7 +4531,7 @@
           <a:lstStyle/>
           <a:p>
             <a:r>
-              <a:rPr kumimoji="1" lang="en-US" altLang="ja-JP" sz="2800" dirty="0" smtClean="0"/>
+              <a:rPr kumimoji="1" lang="en-US" altLang="ja-JP" sz="2800" dirty="0"/>
               <a:t>F</a:t>
             </a:r>
             <a:endParaRPr kumimoji="1" lang="ja-JP" altLang="en-US" sz="2800" dirty="0"/>
@@ -4579,7 +4561,7 @@
           <a:lstStyle/>
           <a:p>
             <a:r>
-              <a:rPr kumimoji="1" lang="en-US" altLang="ja-JP" sz="2800" dirty="0" smtClean="0"/>
+              <a:rPr kumimoji="1" lang="en-US" altLang="ja-JP" sz="2800" dirty="0"/>
               <a:t>T</a:t>
             </a:r>
             <a:endParaRPr kumimoji="1" lang="ja-JP" altLang="en-US" sz="2800" dirty="0"/>
@@ -4679,152 +4661,152 @@
           <a:lstStyle/>
           <a:p>
             <a:r>
-              <a:rPr lang="en-US" altLang="ja-JP" sz="2000" b="1" dirty="0" smtClean="0"/>
+              <a:rPr lang="en-US" altLang="ja-JP" sz="2000" b="1" dirty="0"/>
               <a:t>while</a:t>
             </a:r>
             <a:r>
-              <a:rPr lang="en-US" altLang="ja-JP" sz="2000" dirty="0" smtClean="0"/>
+              <a:rPr lang="en-US" altLang="ja-JP" sz="2000" dirty="0"/>
               <a:t> x&gt;0 </a:t>
             </a:r>
             <a:r>
-              <a:rPr lang="en-US" altLang="ja-JP" sz="2000" b="1" dirty="0" smtClean="0"/>
+              <a:rPr lang="en-US" altLang="ja-JP" sz="2000" b="1" dirty="0"/>
               <a:t>do</a:t>
             </a:r>
           </a:p>
           <a:p>
             <a:r>
-              <a:rPr lang="en-US" altLang="ja-JP" sz="2000" b="1" dirty="0" smtClean="0"/>
+              <a:rPr lang="en-US" altLang="ja-JP" sz="2000" b="1" dirty="0"/>
               <a:t>    begin</a:t>
             </a:r>
           </a:p>
           <a:p>
             <a:r>
-              <a:rPr lang="en-US" altLang="ja-JP" sz="2000" b="1" dirty="0" smtClean="0"/>
+              <a:rPr lang="en-US" altLang="ja-JP" sz="2000" b="1" dirty="0"/>
               <a:t>        while </a:t>
             </a:r>
             <a:r>
-              <a:rPr lang="en-US" altLang="ja-JP" sz="2000" dirty="0" smtClean="0"/>
+              <a:rPr lang="en-US" altLang="ja-JP" sz="2000" dirty="0"/>
               <a:t>y&gt;0</a:t>
             </a:r>
             <a:r>
-              <a:rPr lang="en-US" altLang="ja-JP" sz="2000" b="1" dirty="0" smtClean="0"/>
+              <a:rPr lang="en-US" altLang="ja-JP" sz="2000" b="1" dirty="0"/>
               <a:t> do</a:t>
             </a:r>
           </a:p>
           <a:p>
             <a:r>
-              <a:rPr lang="en-US" altLang="ja-JP" sz="2000" dirty="0" smtClean="0"/>
+              <a:rPr lang="en-US" altLang="ja-JP" sz="2000" dirty="0"/>
               <a:t>            </a:t>
             </a:r>
             <a:r>
-              <a:rPr lang="en-US" altLang="ja-JP" sz="2000" b="1" dirty="0" smtClean="0"/>
+              <a:rPr lang="en-US" altLang="ja-JP" sz="2000" b="1" dirty="0"/>
               <a:t>begin</a:t>
             </a:r>
           </a:p>
           <a:p>
             <a:r>
-              <a:rPr lang="en-US" altLang="ja-JP" sz="2000" dirty="0" smtClean="0"/>
+              <a:rPr lang="en-US" altLang="ja-JP" sz="2000" dirty="0"/>
               <a:t>                </a:t>
             </a:r>
             <a:r>
-              <a:rPr lang="en-US" altLang="ja-JP" sz="2000" b="1" dirty="0" smtClean="0"/>
+              <a:rPr lang="en-US" altLang="ja-JP" sz="2000" b="1" dirty="0"/>
               <a:t>if</a:t>
             </a:r>
             <a:r>
-              <a:rPr lang="en-US" altLang="ja-JP" sz="2000" dirty="0" smtClean="0"/>
+              <a:rPr lang="en-US" altLang="ja-JP" sz="2000" dirty="0"/>
               <a:t> x</a:t>
             </a:r>
             <a:r>
-              <a:rPr lang="en-US" altLang="ja-JP" sz="2000" dirty="0" smtClean="0">
+              <a:rPr lang="en-US" altLang="ja-JP" sz="2000" dirty="0">
                 <a:sym typeface="Symbol"/>
               </a:rPr>
               <a:t></a:t>
             </a:r>
             <a:r>
-              <a:rPr lang="en-US" altLang="ja-JP" sz="2000" dirty="0" smtClean="0"/>
+              <a:rPr lang="en-US" altLang="ja-JP" sz="2000" dirty="0"/>
               <a:t>3 </a:t>
             </a:r>
             <a:r>
-              <a:rPr lang="en-US" altLang="ja-JP" sz="2000" b="1" dirty="0" smtClean="0"/>
+              <a:rPr lang="en-US" altLang="ja-JP" sz="2000" b="1" dirty="0"/>
               <a:t>then</a:t>
             </a:r>
           </a:p>
           <a:p>
             <a:r>
-              <a:rPr lang="en-US" altLang="ja-JP" sz="2000" b="1" dirty="0" smtClean="0"/>
+              <a:rPr lang="en-US" altLang="ja-JP" sz="2000" b="1" dirty="0"/>
               <a:t>                    begin</a:t>
             </a:r>
           </a:p>
           <a:p>
             <a:r>
-              <a:rPr lang="en-US" altLang="ja-JP" sz="2000" b="1" dirty="0" smtClean="0"/>
+              <a:rPr lang="en-US" altLang="ja-JP" sz="2000" b="1" dirty="0"/>
               <a:t>                        </a:t>
             </a:r>
             <a:r>
-              <a:rPr lang="en-US" altLang="ja-JP" sz="2000" dirty="0" smtClean="0"/>
+              <a:rPr lang="en-US" altLang="ja-JP" sz="2000" dirty="0"/>
               <a:t>y := y – 1;</a:t>
             </a:r>
           </a:p>
           <a:p>
             <a:r>
-              <a:rPr lang="en-US" altLang="ja-JP" sz="2000" dirty="0" smtClean="0"/>
+              <a:rPr lang="en-US" altLang="ja-JP" sz="2000" dirty="0"/>
               <a:t>                        </a:t>
             </a:r>
             <a:r>
-              <a:rPr lang="en-US" altLang="ja-JP" sz="2000" b="1" dirty="0" smtClean="0"/>
+              <a:rPr lang="en-US" altLang="ja-JP" sz="2000" b="1" dirty="0"/>
               <a:t>continue</a:t>
             </a:r>
           </a:p>
           <a:p>
             <a:r>
-              <a:rPr lang="en-US" altLang="ja-JP" sz="2000" b="1" dirty="0" smtClean="0"/>
+              <a:rPr lang="en-US" altLang="ja-JP" sz="2000" b="1" dirty="0"/>
               <a:t>                    end</a:t>
             </a:r>
-            <a:endParaRPr lang="en-US" altLang="ja-JP" sz="2000" dirty="0" smtClean="0"/>
-          </a:p>
-          <a:p>
-            <a:r>
-              <a:rPr lang="en-US" altLang="ja-JP" sz="2000" b="1" dirty="0" smtClean="0"/>
+            <a:endParaRPr lang="en-US" altLang="ja-JP" sz="2000" dirty="0"/>
+          </a:p>
+          <a:p>
+            <a:r>
+              <a:rPr lang="en-US" altLang="ja-JP" sz="2000" b="1" dirty="0"/>
               <a:t>                </a:t>
             </a:r>
             <a:r>
-              <a:rPr lang="en-US" altLang="ja-JP" sz="2000" dirty="0" smtClean="0"/>
+              <a:rPr lang="en-US" altLang="ja-JP" sz="2000" dirty="0"/>
               <a:t>z := z + 1;  </a:t>
             </a:r>
           </a:p>
           <a:p>
             <a:r>
-              <a:rPr lang="en-US" altLang="ja-JP" sz="2000" dirty="0" smtClean="0"/>
+              <a:rPr lang="en-US" altLang="ja-JP" sz="2000" dirty="0"/>
               <a:t>                y := y - 1</a:t>
             </a:r>
           </a:p>
           <a:p>
             <a:r>
-              <a:rPr lang="en-US" altLang="ja-JP" sz="2000" dirty="0" smtClean="0"/>
+              <a:rPr lang="en-US" altLang="ja-JP" sz="2000" dirty="0"/>
               <a:t>            </a:t>
             </a:r>
             <a:r>
-              <a:rPr lang="en-US" altLang="ja-JP" sz="2000" b="1" dirty="0" smtClean="0"/>
+              <a:rPr lang="en-US" altLang="ja-JP" sz="2000" b="1" dirty="0"/>
               <a:t>end</a:t>
             </a:r>
             <a:r>
-              <a:rPr lang="en-US" altLang="ja-JP" sz="2000" dirty="0" smtClean="0"/>
+              <a:rPr lang="en-US" altLang="ja-JP" sz="2000" dirty="0"/>
               <a:t>;</a:t>
             </a:r>
           </a:p>
           <a:p>
             <a:r>
-              <a:rPr lang="en-US" altLang="ja-JP" sz="2000" dirty="0" smtClean="0"/>
+              <a:rPr lang="en-US" altLang="ja-JP" sz="2000" dirty="0"/>
               <a:t>        x := x – 1</a:t>
             </a:r>
           </a:p>
           <a:p>
             <a:r>
-              <a:rPr lang="en-US" altLang="ja-JP" sz="2000" dirty="0" smtClean="0"/>
+              <a:rPr lang="en-US" altLang="ja-JP" sz="2000" dirty="0"/>
               <a:t>   </a:t>
             </a:r>
             <a:r>
-              <a:rPr lang="en-US" altLang="ja-JP" sz="2000" b="1" dirty="0" smtClean="0"/>
+              <a:rPr lang="en-US" altLang="ja-JP" sz="2000" b="1" dirty="0"/>
               <a:t> end</a:t>
             </a:r>
             <a:endParaRPr lang="ja-JP" altLang="en-US" sz="2000" b="1" dirty="0"/>
@@ -5017,7 +4999,7 @@
           <a:p>
             <a:pPr algn="ctr"/>
             <a:r>
-              <a:rPr kumimoji="1" lang="en-US" altLang="ja-JP" sz="2800" dirty="0" smtClean="0">
+              <a:rPr kumimoji="1" lang="en-US" altLang="ja-JP" sz="2800" dirty="0">
                 <a:solidFill>
                   <a:schemeClr val="tx1"/>
                 </a:solidFill>
@@ -5025,7 +5007,7 @@
               <a:t>x</a:t>
             </a:r>
             <a:r>
-              <a:rPr kumimoji="1" lang="en-US" altLang="ja-JP" sz="2800" dirty="0" smtClean="0">
+              <a:rPr kumimoji="1" lang="en-US" altLang="ja-JP" sz="2800" dirty="0">
                 <a:solidFill>
                   <a:schemeClr val="tx1"/>
                 </a:solidFill>
@@ -5034,7 +5016,7 @@
               <a:t></a:t>
             </a:r>
             <a:r>
-              <a:rPr kumimoji="1" lang="en-US" altLang="ja-JP" sz="2800" dirty="0" smtClean="0">
+              <a:rPr kumimoji="1" lang="en-US" altLang="ja-JP" sz="2800" dirty="0">
                 <a:solidFill>
                   <a:schemeClr val="tx1"/>
                 </a:solidFill>
@@ -5072,7 +5054,7 @@
           <a:lstStyle/>
           <a:p>
             <a:r>
-              <a:rPr kumimoji="1" lang="en-US" altLang="ja-JP" sz="2800" dirty="0" smtClean="0"/>
+              <a:rPr kumimoji="1" lang="en-US" altLang="ja-JP" sz="2800" dirty="0"/>
               <a:t>F</a:t>
             </a:r>
             <a:endParaRPr kumimoji="1" lang="ja-JP" altLang="en-US" sz="2800" dirty="0"/>
@@ -5102,7 +5084,7 @@
           <a:lstStyle/>
           <a:p>
             <a:r>
-              <a:rPr kumimoji="1" lang="en-US" altLang="ja-JP" sz="2800" dirty="0" smtClean="0"/>
+              <a:rPr kumimoji="1" lang="en-US" altLang="ja-JP" sz="2800" dirty="0"/>
               <a:t>T</a:t>
             </a:r>
             <a:endParaRPr kumimoji="1" lang="ja-JP" altLang="en-US" sz="2800" dirty="0"/>
@@ -5169,7 +5151,7 @@
           <a:lstStyle/>
           <a:p>
             <a:r>
-              <a:rPr lang="en-US" altLang="ja-JP" sz="2800" dirty="0" smtClean="0"/>
+              <a:rPr lang="en-US" altLang="ja-JP" sz="2800" dirty="0"/>
               <a:t>  y := y-1</a:t>
             </a:r>
           </a:p>
@@ -5559,7 +5541,7 @@
           <a:lstStyle/>
           <a:p>
             <a:r>
-              <a:rPr lang="en-US" altLang="ja-JP" sz="2800" dirty="0" smtClean="0"/>
+              <a:rPr lang="en-US" altLang="ja-JP" sz="2800" dirty="0"/>
               <a:t>  z := z+1</a:t>
             </a:r>
           </a:p>
@@ -5624,7 +5606,7 @@
           <a:lstStyle/>
           <a:p>
             <a:r>
-              <a:rPr lang="en-US" altLang="ja-JP" sz="2800" dirty="0" smtClean="0"/>
+              <a:rPr lang="en-US" altLang="ja-JP" sz="2800" dirty="0"/>
               <a:t>  y := y-1</a:t>
             </a:r>
           </a:p>
@@ -5742,18 +5724,9 @@
           <a:lstStyle/>
           <a:p>
             <a:r>
-              <a:rPr kumimoji="1" lang="ja-JP" altLang="en-US" dirty="0" smtClean="0"/>
-              <a:t>練習</a:t>
-            </a:r>
-            <a:r>
-              <a:rPr kumimoji="1" lang="ja-JP" altLang="en-US" dirty="0" smtClean="0"/>
-              <a:t>問題</a:t>
-            </a:r>
-            <a:r>
-              <a:rPr kumimoji="1" lang="ja-JP" altLang="en-US" dirty="0" smtClean="0"/>
-              <a:t>６</a:t>
-            </a:r>
-            <a:endParaRPr kumimoji="1" lang="ja-JP" altLang="en-US" dirty="0"/>
+              <a:rPr kumimoji="1" lang="ja-JP" altLang="en-US" dirty="0"/>
+              <a:t>練習問題６</a:t>
+            </a:r>
           </a:p>
         </p:txBody>
       </p:sp>
@@ -5780,52 +5753,52 @@
           <a:lstStyle/>
           <a:p>
             <a:r>
-              <a:rPr lang="ja-JP" altLang="en-US" sz="2800" dirty="0" smtClean="0"/>
+              <a:rPr lang="ja-JP" altLang="en-US" sz="2800" dirty="0"/>
               <a:t>以下のプログラム断片の制御フローを図示せよ。</a:t>
             </a:r>
-            <a:endParaRPr lang="en-US" altLang="ja-JP" sz="2800" dirty="0" smtClean="0"/>
-          </a:p>
-          <a:p>
-            <a:r>
-              <a:rPr lang="en-US" altLang="ja-JP" sz="2800" dirty="0" smtClean="0"/>
+            <a:endParaRPr lang="en-US" altLang="ja-JP" sz="2800" dirty="0"/>
+          </a:p>
+          <a:p>
+            <a:r>
+              <a:rPr lang="en-US" altLang="ja-JP" sz="2800" dirty="0"/>
               <a:t>x := 10;</a:t>
             </a:r>
           </a:p>
           <a:p>
             <a:r>
-              <a:rPr lang="en-US" altLang="ja-JP" sz="2800" dirty="0" smtClean="0"/>
+              <a:rPr lang="en-US" altLang="ja-JP" sz="2800" dirty="0"/>
               <a:t>sum := 0;</a:t>
             </a:r>
           </a:p>
           <a:p>
             <a:r>
-              <a:rPr lang="en-US" altLang="ja-JP" sz="2800" dirty="0" smtClean="0"/>
+              <a:rPr lang="en-US" altLang="ja-JP" sz="2800" dirty="0"/>
               <a:t>L:  sum := sum + x;</a:t>
             </a:r>
           </a:p>
           <a:p>
             <a:r>
-              <a:rPr lang="en-US" altLang="ja-JP" sz="2800" dirty="0" smtClean="0"/>
+              <a:rPr lang="en-US" altLang="ja-JP" sz="2800" dirty="0"/>
               <a:t>x := x – 1;</a:t>
             </a:r>
           </a:p>
           <a:p>
             <a:r>
-              <a:rPr lang="en-US" altLang="ja-JP" sz="2800" dirty="0" smtClean="0"/>
+              <a:rPr lang="en-US" altLang="ja-JP" sz="2800" dirty="0"/>
               <a:t>if x &gt; 0 then</a:t>
             </a:r>
           </a:p>
           <a:p>
             <a:r>
-              <a:rPr lang="en-US" altLang="ja-JP" sz="2800" dirty="0" smtClean="0"/>
+              <a:rPr lang="en-US" altLang="ja-JP" sz="2800" dirty="0"/>
               <a:t>    </a:t>
             </a:r>
             <a:r>
-              <a:rPr lang="en-US" altLang="ja-JP" sz="2800" dirty="0" err="1" smtClean="0"/>
+              <a:rPr lang="en-US" altLang="ja-JP" sz="2800" dirty="0" err="1"/>
               <a:t>goto</a:t>
             </a:r>
             <a:r>
-              <a:rPr lang="en-US" altLang="ja-JP" sz="2800" dirty="0" smtClean="0"/>
+              <a:rPr lang="en-US" altLang="ja-JP" sz="2800" dirty="0"/>
               <a:t> L</a:t>
             </a:r>
           </a:p>
@@ -5872,10 +5845,9 @@
           <a:lstStyle/>
           <a:p>
             <a:r>
-              <a:rPr kumimoji="1" lang="ja-JP" altLang="en-US" dirty="0" smtClean="0"/>
+              <a:rPr kumimoji="1" lang="ja-JP" altLang="en-US" dirty="0"/>
               <a:t>解答例</a:t>
             </a:r>
-            <a:endParaRPr kumimoji="1" lang="ja-JP" altLang="en-US" dirty="0"/>
           </a:p>
         </p:txBody>
       </p:sp>
@@ -5901,45 +5873,45 @@
           <a:lstStyle/>
           <a:p>
             <a:r>
-              <a:rPr lang="en-US" altLang="ja-JP" sz="2400" dirty="0" smtClean="0"/>
+              <a:rPr lang="en-US" altLang="ja-JP" sz="2400" dirty="0"/>
               <a:t>x := 10;</a:t>
             </a:r>
           </a:p>
           <a:p>
             <a:r>
-              <a:rPr lang="en-US" altLang="ja-JP" sz="2400" dirty="0" smtClean="0"/>
+              <a:rPr lang="en-US" altLang="ja-JP" sz="2400" dirty="0"/>
               <a:t>sum := 0;</a:t>
             </a:r>
           </a:p>
           <a:p>
             <a:r>
-              <a:rPr lang="en-US" altLang="ja-JP" sz="2400" dirty="0" smtClean="0"/>
+              <a:rPr lang="en-US" altLang="ja-JP" sz="2400" dirty="0"/>
               <a:t>L:  sum := sum + x;</a:t>
             </a:r>
           </a:p>
           <a:p>
             <a:r>
-              <a:rPr lang="en-US" altLang="ja-JP" sz="2400" dirty="0" smtClean="0"/>
+              <a:rPr lang="en-US" altLang="ja-JP" sz="2400" dirty="0"/>
               <a:t>x := x – 1;</a:t>
             </a:r>
           </a:p>
           <a:p>
             <a:r>
-              <a:rPr lang="en-US" altLang="ja-JP" sz="2400" dirty="0" smtClean="0"/>
+              <a:rPr lang="en-US" altLang="ja-JP" sz="2400" dirty="0"/>
               <a:t>if x &gt; 0 then</a:t>
             </a:r>
           </a:p>
           <a:p>
             <a:r>
-              <a:rPr lang="en-US" altLang="ja-JP" sz="2400" dirty="0" smtClean="0"/>
+              <a:rPr lang="en-US" altLang="ja-JP" sz="2400" dirty="0"/>
               <a:t>    </a:t>
             </a:r>
             <a:r>
-              <a:rPr lang="en-US" altLang="ja-JP" sz="2400" dirty="0" err="1" smtClean="0"/>
+              <a:rPr lang="en-US" altLang="ja-JP" sz="2400" dirty="0" err="1"/>
               <a:t>goto</a:t>
             </a:r>
             <a:r>
-              <a:rPr lang="en-US" altLang="ja-JP" sz="2400" dirty="0" smtClean="0"/>
+              <a:rPr lang="en-US" altLang="ja-JP" sz="2400" dirty="0"/>
               <a:t> L</a:t>
             </a:r>
           </a:p>
@@ -5968,7 +5940,7 @@
           <a:lstStyle/>
           <a:p>
             <a:r>
-              <a:rPr kumimoji="1" lang="en-US" altLang="ja-JP" sz="2800" dirty="0" smtClean="0"/>
+              <a:rPr kumimoji="1" lang="en-US" altLang="ja-JP" sz="2800" dirty="0"/>
               <a:t> x := 10</a:t>
             </a:r>
             <a:endParaRPr kumimoji="1" lang="ja-JP" altLang="en-US" sz="2800" dirty="0"/>
@@ -6034,7 +6006,7 @@
           <a:lstStyle/>
           <a:p>
             <a:r>
-              <a:rPr lang="en-US" altLang="ja-JP" sz="2800" dirty="0" smtClean="0"/>
+              <a:rPr lang="en-US" altLang="ja-JP" sz="2800" dirty="0"/>
               <a:t> sum := 0</a:t>
             </a:r>
             <a:endParaRPr kumimoji="1" lang="ja-JP" altLang="en-US" sz="2800" dirty="0"/>
@@ -6099,7 +6071,7 @@
           <a:lstStyle/>
           <a:p>
             <a:r>
-              <a:rPr lang="en-US" altLang="ja-JP" sz="2800" dirty="0" smtClean="0"/>
+              <a:rPr lang="en-US" altLang="ja-JP" sz="2800" dirty="0"/>
               <a:t>sum := sum + x</a:t>
             </a:r>
             <a:endParaRPr lang="ja-JP" altLang="en-US" sz="2800" dirty="0"/>
@@ -6128,7 +6100,7 @@
           <a:lstStyle/>
           <a:p>
             <a:r>
-              <a:rPr lang="en-US" altLang="ja-JP" sz="2800" dirty="0" smtClean="0"/>
+              <a:rPr lang="en-US" altLang="ja-JP" sz="2800" dirty="0"/>
               <a:t>x := x – 1</a:t>
             </a:r>
             <a:endParaRPr lang="ja-JP" altLang="en-US" sz="2800" dirty="0"/>
@@ -6286,7 +6258,7 @@
           <a:p>
             <a:pPr algn="ctr"/>
             <a:r>
-              <a:rPr lang="en-US" altLang="ja-JP" sz="2800" dirty="0" smtClean="0">
+              <a:rPr lang="en-US" altLang="ja-JP" sz="2800" dirty="0">
                 <a:solidFill>
                   <a:schemeClr val="tx1"/>
                 </a:solidFill>
@@ -6506,7 +6478,7 @@
           <a:lstStyle/>
           <a:p>
             <a:r>
-              <a:rPr kumimoji="1" lang="en-US" altLang="ja-JP" sz="2800" dirty="0" smtClean="0"/>
+              <a:rPr kumimoji="1" lang="en-US" altLang="ja-JP" sz="2800" dirty="0"/>
               <a:t>T</a:t>
             </a:r>
             <a:endParaRPr kumimoji="1" lang="ja-JP" altLang="en-US" sz="2800" dirty="0"/>
@@ -6536,7 +6508,7 @@
           <a:lstStyle/>
           <a:p>
             <a:r>
-              <a:rPr kumimoji="1" lang="en-US" altLang="ja-JP" sz="2800" dirty="0" smtClean="0"/>
+              <a:rPr kumimoji="1" lang="en-US" altLang="ja-JP" sz="2800" dirty="0"/>
               <a:t>F</a:t>
             </a:r>
             <a:endParaRPr kumimoji="1" lang="ja-JP" altLang="en-US" sz="2800" dirty="0"/>
@@ -6591,10 +6563,9 @@
           <a:lstStyle/>
           <a:p>
             <a:r>
-              <a:rPr kumimoji="1" lang="ja-JP" altLang="en-US" dirty="0" smtClean="0"/>
+              <a:rPr kumimoji="1" lang="ja-JP" altLang="en-US" dirty="0"/>
               <a:t>練習問題７</a:t>
             </a:r>
-            <a:endParaRPr kumimoji="1" lang="ja-JP" altLang="en-US" dirty="0"/>
           </a:p>
         </p:txBody>
       </p:sp>
@@ -6621,30 +6592,30 @@
           <a:lstStyle/>
           <a:p>
             <a:r>
-              <a:rPr kumimoji="1" lang="ja-JP" altLang="en-US" sz="2800" dirty="0" smtClean="0"/>
+              <a:rPr kumimoji="1" lang="ja-JP" altLang="en-US" sz="2800" dirty="0"/>
               <a:t>以下のプログラム中の２か所の</a:t>
             </a:r>
             <a:r>
-              <a:rPr kumimoji="1" lang="en-US" altLang="ja-JP" sz="2800" dirty="0" smtClean="0"/>
+              <a:rPr kumimoji="1" lang="en-US" altLang="ja-JP" sz="2800" dirty="0"/>
               <a:t>if</a:t>
             </a:r>
             <a:r>
-              <a:rPr kumimoji="1" lang="ja-JP" altLang="en-US" sz="2800" dirty="0" smtClean="0"/>
+              <a:rPr kumimoji="1" lang="ja-JP" altLang="en-US" sz="2800" dirty="0"/>
               <a:t>文および内側の</a:t>
             </a:r>
             <a:r>
-              <a:rPr kumimoji="1" lang="en-US" altLang="ja-JP" sz="2800" dirty="0" smtClean="0"/>
+              <a:rPr kumimoji="1" lang="en-US" altLang="ja-JP" sz="2800" dirty="0"/>
               <a:t>while</a:t>
             </a:r>
             <a:r>
-              <a:rPr kumimoji="1" lang="ja-JP" altLang="en-US" sz="2800" dirty="0" smtClean="0"/>
+              <a:rPr kumimoji="1" lang="ja-JP" altLang="en-US" sz="2800" dirty="0"/>
               <a:t>文の入口</a:t>
             </a:r>
             <a:r>
-              <a:rPr lang="ja-JP" altLang="en-US" sz="2800" dirty="0" smtClean="0"/>
+              <a:rPr lang="ja-JP" altLang="en-US" sz="2800" dirty="0"/>
               <a:t>、出口はそれぞれいくつか。</a:t>
             </a:r>
-            <a:endParaRPr kumimoji="1" lang="en-US" altLang="ja-JP" sz="2800" dirty="0" smtClean="0"/>
+            <a:endParaRPr kumimoji="1" lang="en-US" altLang="ja-JP" sz="2800" dirty="0"/>
           </a:p>
         </p:txBody>
       </p:sp>
@@ -6671,162 +6642,162 @@
           <a:lstStyle/>
           <a:p>
             <a:r>
-              <a:rPr lang="en-US" altLang="ja-JP" sz="2800" b="1" dirty="0" smtClean="0"/>
+              <a:rPr lang="en-US" altLang="ja-JP" sz="2800" b="1" dirty="0"/>
               <a:t>while</a:t>
             </a:r>
             <a:r>
-              <a:rPr lang="en-US" altLang="ja-JP" sz="2800" dirty="0" smtClean="0"/>
+              <a:rPr lang="en-US" altLang="ja-JP" sz="2800" dirty="0"/>
               <a:t> x&gt;0 </a:t>
             </a:r>
             <a:r>
-              <a:rPr lang="en-US" altLang="ja-JP" sz="2800" b="1" dirty="0" smtClean="0"/>
+              <a:rPr lang="en-US" altLang="ja-JP" sz="2800" b="1" dirty="0"/>
               <a:t>do</a:t>
             </a:r>
           </a:p>
           <a:p>
             <a:r>
-              <a:rPr lang="en-US" altLang="ja-JP" sz="2800" b="1" dirty="0" smtClean="0"/>
+              <a:rPr lang="en-US" altLang="ja-JP" sz="2800" b="1" dirty="0"/>
               <a:t>    begin</a:t>
             </a:r>
           </a:p>
           <a:p>
             <a:r>
-              <a:rPr lang="en-US" altLang="ja-JP" sz="2800" b="1" dirty="0" smtClean="0"/>
+              <a:rPr lang="en-US" altLang="ja-JP" sz="2800" b="1" dirty="0"/>
               <a:t>        while </a:t>
             </a:r>
             <a:r>
-              <a:rPr lang="en-US" altLang="ja-JP" sz="2800" dirty="0" smtClean="0"/>
+              <a:rPr lang="en-US" altLang="ja-JP" sz="2800" dirty="0"/>
               <a:t>y&gt;0</a:t>
             </a:r>
             <a:r>
-              <a:rPr lang="en-US" altLang="ja-JP" sz="2800" b="1" dirty="0" smtClean="0"/>
+              <a:rPr lang="en-US" altLang="ja-JP" sz="2800" b="1" dirty="0"/>
               <a:t> do</a:t>
             </a:r>
           </a:p>
           <a:p>
             <a:r>
-              <a:rPr lang="en-US" altLang="ja-JP" sz="2800" dirty="0" smtClean="0"/>
+              <a:rPr lang="en-US" altLang="ja-JP" sz="2800" dirty="0"/>
               <a:t>            </a:t>
             </a:r>
             <a:r>
-              <a:rPr lang="en-US" altLang="ja-JP" sz="2800" b="1" dirty="0" smtClean="0"/>
+              <a:rPr lang="en-US" altLang="ja-JP" sz="2800" b="1" dirty="0"/>
               <a:t>begin</a:t>
             </a:r>
           </a:p>
           <a:p>
             <a:r>
-              <a:rPr lang="en-US" altLang="ja-JP" sz="2800" dirty="0" smtClean="0"/>
+              <a:rPr lang="en-US" altLang="ja-JP" sz="2800" dirty="0"/>
               <a:t>                </a:t>
             </a:r>
             <a:r>
-              <a:rPr lang="en-US" altLang="ja-JP" sz="2800" b="1" dirty="0" smtClean="0"/>
+              <a:rPr lang="en-US" altLang="ja-JP" sz="2800" b="1" dirty="0"/>
               <a:t>if</a:t>
             </a:r>
             <a:r>
-              <a:rPr lang="en-US" altLang="ja-JP" sz="2800" dirty="0" smtClean="0"/>
+              <a:rPr lang="en-US" altLang="ja-JP" sz="2800" dirty="0"/>
               <a:t> x=3 </a:t>
             </a:r>
             <a:r>
-              <a:rPr lang="en-US" altLang="ja-JP" sz="2800" b="1" dirty="0" smtClean="0"/>
+              <a:rPr lang="en-US" altLang="ja-JP" sz="2800" b="1" dirty="0"/>
               <a:t>then</a:t>
             </a:r>
           </a:p>
           <a:p>
             <a:r>
-              <a:rPr kumimoji="1" lang="en-US" altLang="ja-JP" sz="2800" dirty="0" smtClean="0"/>
+              <a:rPr kumimoji="1" lang="en-US" altLang="ja-JP" sz="2800" dirty="0"/>
               <a:t>                    </a:t>
             </a:r>
             <a:r>
-              <a:rPr kumimoji="1" lang="en-US" altLang="ja-JP" sz="2800" b="1" dirty="0" smtClean="0"/>
+              <a:rPr kumimoji="1" lang="en-US" altLang="ja-JP" sz="2800" b="1" dirty="0"/>
               <a:t>break</a:t>
             </a:r>
             <a:r>
-              <a:rPr kumimoji="1" lang="en-US" altLang="ja-JP" sz="2800" dirty="0" smtClean="0"/>
+              <a:rPr kumimoji="1" lang="en-US" altLang="ja-JP" sz="2800" dirty="0"/>
               <a:t>;</a:t>
             </a:r>
           </a:p>
           <a:p>
             <a:r>
-              <a:rPr lang="en-US" altLang="ja-JP" sz="2800" b="1" dirty="0" smtClean="0"/>
+              <a:rPr lang="en-US" altLang="ja-JP" sz="2800" b="1" dirty="0"/>
               <a:t>                </a:t>
             </a:r>
             <a:r>
-              <a:rPr lang="en-US" altLang="ja-JP" sz="2800" dirty="0" smtClean="0"/>
+              <a:rPr lang="en-US" altLang="ja-JP" sz="2800" dirty="0"/>
               <a:t>L:</a:t>
             </a:r>
             <a:r>
-              <a:rPr lang="en-US" altLang="ja-JP" sz="2800" b="1" dirty="0" smtClean="0"/>
+              <a:rPr lang="en-US" altLang="ja-JP" sz="2800" b="1" dirty="0"/>
               <a:t>  </a:t>
             </a:r>
             <a:r>
-              <a:rPr lang="en-US" altLang="ja-JP" sz="2800" dirty="0" smtClean="0"/>
+              <a:rPr lang="en-US" altLang="ja-JP" sz="2800" dirty="0"/>
               <a:t>z := z + 1;</a:t>
             </a:r>
           </a:p>
           <a:p>
             <a:r>
-              <a:rPr kumimoji="1" lang="en-US" altLang="ja-JP" sz="2800" dirty="0" smtClean="0"/>
+              <a:rPr kumimoji="1" lang="en-US" altLang="ja-JP" sz="2800" dirty="0"/>
               <a:t>                y := y - 1</a:t>
             </a:r>
           </a:p>
           <a:p>
             <a:r>
-              <a:rPr kumimoji="1" lang="en-US" altLang="ja-JP" sz="2800" dirty="0" smtClean="0"/>
+              <a:rPr kumimoji="1" lang="en-US" altLang="ja-JP" sz="2800" dirty="0"/>
               <a:t>            </a:t>
             </a:r>
             <a:r>
-              <a:rPr kumimoji="1" lang="en-US" altLang="ja-JP" sz="2800" b="1" dirty="0" smtClean="0"/>
+              <a:rPr kumimoji="1" lang="en-US" altLang="ja-JP" sz="2800" b="1" dirty="0"/>
               <a:t>end</a:t>
             </a:r>
             <a:r>
-              <a:rPr kumimoji="1" lang="en-US" altLang="ja-JP" sz="2800" dirty="0" smtClean="0"/>
+              <a:rPr kumimoji="1" lang="en-US" altLang="ja-JP" sz="2800" dirty="0"/>
               <a:t>;</a:t>
             </a:r>
           </a:p>
           <a:p>
             <a:r>
-              <a:rPr kumimoji="1" lang="en-US" altLang="ja-JP" sz="2800" dirty="0" smtClean="0"/>
+              <a:rPr kumimoji="1" lang="en-US" altLang="ja-JP" sz="2800" dirty="0"/>
               <a:t>        x := x – 1;</a:t>
             </a:r>
           </a:p>
           <a:p>
             <a:r>
-              <a:rPr lang="en-US" altLang="ja-JP" sz="2800" dirty="0" smtClean="0"/>
+              <a:rPr lang="en-US" altLang="ja-JP" sz="2800" dirty="0"/>
               <a:t>        </a:t>
             </a:r>
             <a:r>
-              <a:rPr lang="en-US" altLang="ja-JP" sz="2800" b="1" dirty="0" smtClean="0"/>
+              <a:rPr lang="en-US" altLang="ja-JP" sz="2800" b="1" dirty="0"/>
               <a:t>if</a:t>
             </a:r>
             <a:r>
-              <a:rPr lang="en-US" altLang="ja-JP" sz="2800" dirty="0" smtClean="0"/>
+              <a:rPr lang="en-US" altLang="ja-JP" sz="2800" dirty="0"/>
               <a:t> x = 2 </a:t>
             </a:r>
             <a:r>
-              <a:rPr lang="en-US" altLang="ja-JP" sz="2800" b="1" dirty="0" smtClean="0"/>
+              <a:rPr lang="en-US" altLang="ja-JP" sz="2800" b="1" dirty="0"/>
               <a:t>then</a:t>
             </a:r>
             <a:r>
-              <a:rPr lang="en-US" altLang="ja-JP" sz="2800" dirty="0" smtClean="0"/>
+              <a:rPr lang="en-US" altLang="ja-JP" sz="2800" dirty="0"/>
               <a:t> </a:t>
             </a:r>
             <a:r>
-              <a:rPr lang="en-US" altLang="ja-JP" sz="2800" dirty="0" err="1" smtClean="0"/>
+              <a:rPr lang="en-US" altLang="ja-JP" sz="2800" dirty="0" err="1"/>
               <a:t>goto</a:t>
             </a:r>
             <a:r>
-              <a:rPr lang="en-US" altLang="ja-JP" sz="2800" dirty="0" smtClean="0"/>
+              <a:rPr lang="en-US" altLang="ja-JP" sz="2800" dirty="0"/>
               <a:t> L</a:t>
             </a:r>
-            <a:endParaRPr kumimoji="1" lang="en-US" altLang="ja-JP" sz="2800" dirty="0" smtClean="0"/>
-          </a:p>
-          <a:p>
-            <a:r>
-              <a:rPr lang="en-US" altLang="ja-JP" sz="2800" dirty="0" smtClean="0"/>
+            <a:endParaRPr kumimoji="1" lang="en-US" altLang="ja-JP" sz="2800" dirty="0"/>
+          </a:p>
+          <a:p>
+            <a:r>
+              <a:rPr lang="en-US" altLang="ja-JP" sz="2800" dirty="0"/>
               <a:t>   </a:t>
             </a:r>
             <a:r>
-              <a:rPr lang="en-US" altLang="ja-JP" sz="2800" b="1" dirty="0" smtClean="0"/>
+              <a:rPr lang="en-US" altLang="ja-JP" sz="2800" b="1" dirty="0"/>
               <a:t> end</a:t>
             </a:r>
             <a:endParaRPr kumimoji="1" lang="ja-JP" altLang="en-US" sz="2800" b="1" dirty="0"/>
@@ -6838,13 +6809,6 @@
   <p:clrMapOvr>
     <a:masterClrMapping/>
   </p:clrMapOvr>
-  <p:timing>
-    <p:tnLst>
-      <p:par>
-        <p:cTn xmlns:p14="http://schemas.microsoft.com/office/powerpoint/2010/main" id="1" dur="indefinite" restart="never" nodeType="tmRoot"/>
-      </p:par>
-    </p:tnLst>
-  </p:timing>
 </p:sld>
 </file>
 
@@ -6888,7 +6852,7 @@
           <a:lstStyle/>
           <a:p>
             <a:r>
-              <a:rPr lang="ja-JP" altLang="en-US" dirty="0" smtClean="0"/>
+              <a:rPr lang="ja-JP" altLang="en-US" dirty="0"/>
               <a:t>解答例</a:t>
             </a:r>
             <a:endParaRPr kumimoji="1" lang="ja-JP" altLang="en-US" dirty="0"/>
@@ -6917,161 +6881,161 @@
           <a:lstStyle/>
           <a:p>
             <a:r>
-              <a:rPr lang="en-US" altLang="ja-JP" sz="2000" b="1" dirty="0" smtClean="0"/>
+              <a:rPr lang="en-US" altLang="ja-JP" sz="2000" b="1" dirty="0"/>
               <a:t>while</a:t>
             </a:r>
             <a:r>
-              <a:rPr lang="en-US" altLang="ja-JP" sz="2000" dirty="0" smtClean="0"/>
+              <a:rPr lang="en-US" altLang="ja-JP" sz="2000" dirty="0"/>
               <a:t> x&gt;0 </a:t>
             </a:r>
             <a:r>
-              <a:rPr lang="en-US" altLang="ja-JP" sz="2000" b="1" dirty="0" smtClean="0"/>
+              <a:rPr lang="en-US" altLang="ja-JP" sz="2000" b="1" dirty="0"/>
               <a:t>do</a:t>
             </a:r>
           </a:p>
           <a:p>
             <a:r>
-              <a:rPr lang="en-US" altLang="ja-JP" sz="2000" b="1" dirty="0" smtClean="0"/>
+              <a:rPr lang="en-US" altLang="ja-JP" sz="2000" b="1" dirty="0"/>
               <a:t>    begin</a:t>
             </a:r>
           </a:p>
           <a:p>
             <a:r>
-              <a:rPr lang="en-US" altLang="ja-JP" sz="2000" b="1" dirty="0" smtClean="0"/>
+              <a:rPr lang="en-US" altLang="ja-JP" sz="2000" b="1" dirty="0"/>
               <a:t>        while </a:t>
             </a:r>
             <a:r>
-              <a:rPr lang="en-US" altLang="ja-JP" sz="2000" dirty="0" smtClean="0"/>
+              <a:rPr lang="en-US" altLang="ja-JP" sz="2000" dirty="0"/>
               <a:t>y&gt;0</a:t>
             </a:r>
             <a:r>
-              <a:rPr lang="en-US" altLang="ja-JP" sz="2000" b="1" dirty="0" smtClean="0"/>
+              <a:rPr lang="en-US" altLang="ja-JP" sz="2000" b="1" dirty="0"/>
               <a:t> do</a:t>
             </a:r>
           </a:p>
           <a:p>
             <a:r>
-              <a:rPr lang="en-US" altLang="ja-JP" sz="2000" dirty="0" smtClean="0"/>
+              <a:rPr lang="en-US" altLang="ja-JP" sz="2000" dirty="0"/>
               <a:t>            </a:t>
             </a:r>
             <a:r>
-              <a:rPr lang="en-US" altLang="ja-JP" sz="2000" b="1" dirty="0" smtClean="0"/>
+              <a:rPr lang="en-US" altLang="ja-JP" sz="2000" b="1" dirty="0"/>
               <a:t>begin</a:t>
             </a:r>
           </a:p>
           <a:p>
             <a:r>
-              <a:rPr lang="en-US" altLang="ja-JP" sz="2000" dirty="0" smtClean="0"/>
+              <a:rPr lang="en-US" altLang="ja-JP" sz="2000" dirty="0"/>
               <a:t>                </a:t>
             </a:r>
             <a:r>
-              <a:rPr lang="en-US" altLang="ja-JP" sz="2000" b="1" dirty="0" smtClean="0"/>
+              <a:rPr lang="en-US" altLang="ja-JP" sz="2000" b="1" dirty="0"/>
               <a:t>if</a:t>
             </a:r>
             <a:r>
-              <a:rPr lang="en-US" altLang="ja-JP" sz="2000" dirty="0" smtClean="0"/>
+              <a:rPr lang="en-US" altLang="ja-JP" sz="2000" dirty="0"/>
               <a:t> x=3 </a:t>
             </a:r>
             <a:r>
-              <a:rPr lang="en-US" altLang="ja-JP" sz="2000" b="1" dirty="0" smtClean="0"/>
+              <a:rPr lang="en-US" altLang="ja-JP" sz="2000" b="1" dirty="0"/>
               <a:t>then</a:t>
             </a:r>
           </a:p>
           <a:p>
             <a:r>
-              <a:rPr lang="en-US" altLang="ja-JP" sz="2000" dirty="0" smtClean="0"/>
+              <a:rPr lang="en-US" altLang="ja-JP" sz="2000" dirty="0"/>
               <a:t>                    </a:t>
             </a:r>
             <a:r>
-              <a:rPr lang="en-US" altLang="ja-JP" sz="2000" b="1" dirty="0" smtClean="0"/>
+              <a:rPr lang="en-US" altLang="ja-JP" sz="2000" b="1" dirty="0"/>
               <a:t>break</a:t>
             </a:r>
             <a:r>
-              <a:rPr lang="en-US" altLang="ja-JP" sz="2000" dirty="0" smtClean="0"/>
+              <a:rPr lang="en-US" altLang="ja-JP" sz="2000" dirty="0"/>
               <a:t>;</a:t>
             </a:r>
           </a:p>
           <a:p>
             <a:r>
-              <a:rPr lang="en-US" altLang="ja-JP" sz="2000" b="1" dirty="0" smtClean="0"/>
+              <a:rPr lang="en-US" altLang="ja-JP" sz="2000" b="1" dirty="0"/>
               <a:t>                </a:t>
             </a:r>
             <a:r>
-              <a:rPr lang="en-US" altLang="ja-JP" sz="2000" dirty="0" smtClean="0"/>
+              <a:rPr lang="en-US" altLang="ja-JP" sz="2000" dirty="0"/>
               <a:t>L:</a:t>
             </a:r>
             <a:r>
-              <a:rPr lang="en-US" altLang="ja-JP" sz="2000" b="1" dirty="0" smtClean="0"/>
+              <a:rPr lang="en-US" altLang="ja-JP" sz="2000" b="1" dirty="0"/>
               <a:t>  </a:t>
             </a:r>
             <a:r>
-              <a:rPr lang="en-US" altLang="ja-JP" sz="2000" dirty="0" smtClean="0"/>
+              <a:rPr lang="en-US" altLang="ja-JP" sz="2000" dirty="0"/>
               <a:t>z := z + 1;</a:t>
             </a:r>
           </a:p>
           <a:p>
             <a:r>
-              <a:rPr lang="en-US" altLang="ja-JP" sz="2000" dirty="0" smtClean="0"/>
+              <a:rPr lang="en-US" altLang="ja-JP" sz="2000" dirty="0"/>
               <a:t>                y := y - 1</a:t>
             </a:r>
           </a:p>
           <a:p>
             <a:r>
-              <a:rPr lang="en-US" altLang="ja-JP" sz="2000" dirty="0" smtClean="0"/>
+              <a:rPr lang="en-US" altLang="ja-JP" sz="2000" dirty="0"/>
               <a:t>            </a:t>
             </a:r>
             <a:r>
-              <a:rPr lang="en-US" altLang="ja-JP" sz="2000" b="1" dirty="0" smtClean="0"/>
+              <a:rPr lang="en-US" altLang="ja-JP" sz="2000" b="1" dirty="0"/>
               <a:t>end</a:t>
             </a:r>
             <a:r>
-              <a:rPr lang="en-US" altLang="ja-JP" sz="2000" dirty="0" smtClean="0"/>
+              <a:rPr lang="en-US" altLang="ja-JP" sz="2000" dirty="0"/>
               <a:t>;</a:t>
             </a:r>
           </a:p>
           <a:p>
             <a:r>
-              <a:rPr lang="en-US" altLang="ja-JP" sz="2000" dirty="0" smtClean="0"/>
+              <a:rPr lang="en-US" altLang="ja-JP" sz="2000" dirty="0"/>
               <a:t>        x := x – 1;</a:t>
             </a:r>
           </a:p>
           <a:p>
             <a:r>
-              <a:rPr lang="en-US" altLang="ja-JP" sz="2000" dirty="0" smtClean="0"/>
+              <a:rPr lang="en-US" altLang="ja-JP" sz="2000" dirty="0"/>
               <a:t>        </a:t>
             </a:r>
             <a:r>
-              <a:rPr lang="en-US" altLang="ja-JP" sz="2000" b="1" dirty="0" smtClean="0"/>
+              <a:rPr lang="en-US" altLang="ja-JP" sz="2000" b="1" dirty="0"/>
               <a:t>if</a:t>
             </a:r>
             <a:r>
-              <a:rPr lang="en-US" altLang="ja-JP" sz="2000" dirty="0" smtClean="0"/>
+              <a:rPr lang="en-US" altLang="ja-JP" sz="2000" dirty="0"/>
               <a:t> x = 2 </a:t>
             </a:r>
             <a:r>
-              <a:rPr lang="en-US" altLang="ja-JP" sz="2000" b="1" dirty="0" smtClean="0"/>
+              <a:rPr lang="en-US" altLang="ja-JP" sz="2000" b="1" dirty="0"/>
               <a:t>then</a:t>
             </a:r>
             <a:r>
-              <a:rPr lang="en-US" altLang="ja-JP" sz="2000" dirty="0" smtClean="0"/>
+              <a:rPr lang="en-US" altLang="ja-JP" sz="2000" dirty="0"/>
               <a:t> </a:t>
             </a:r>
             <a:r>
-              <a:rPr lang="en-US" altLang="ja-JP" sz="2000" dirty="0" err="1" smtClean="0"/>
+              <a:rPr lang="en-US" altLang="ja-JP" sz="2000" dirty="0" err="1"/>
               <a:t>goto</a:t>
             </a:r>
             <a:r>
-              <a:rPr lang="en-US" altLang="ja-JP" sz="2000" dirty="0" smtClean="0"/>
+              <a:rPr lang="en-US" altLang="ja-JP" sz="2000" dirty="0"/>
               <a:t> L</a:t>
             </a:r>
           </a:p>
           <a:p>
             <a:r>
-              <a:rPr lang="en-US" altLang="ja-JP" sz="2000" dirty="0" smtClean="0"/>
+              <a:rPr lang="en-US" altLang="ja-JP" sz="2000" dirty="0"/>
               <a:t>   </a:t>
             </a:r>
             <a:r>
-              <a:rPr lang="en-US" altLang="ja-JP" sz="2000" b="1" dirty="0" smtClean="0"/>
+              <a:rPr lang="en-US" altLang="ja-JP" sz="2000" b="1" dirty="0"/>
               <a:t> end</a:t>
             </a:r>
             <a:endParaRPr lang="ja-JP" altLang="en-US" sz="2000" b="1" dirty="0"/>
@@ -7121,7 +7085,7 @@
           <a:p>
             <a:pPr algn="ctr"/>
             <a:r>
-              <a:rPr lang="en-US" altLang="ja-JP" sz="2800" dirty="0" smtClean="0">
+              <a:rPr lang="en-US" altLang="ja-JP" sz="2800" dirty="0">
                 <a:solidFill>
                   <a:schemeClr val="tx1"/>
                 </a:solidFill>
@@ -7195,7 +7159,7 @@
           <a:lstStyle/>
           <a:p>
             <a:r>
-              <a:rPr kumimoji="1" lang="en-US" altLang="ja-JP" sz="2800" dirty="0" smtClean="0"/>
+              <a:rPr kumimoji="1" lang="en-US" altLang="ja-JP" sz="2800" dirty="0"/>
               <a:t>T</a:t>
             </a:r>
             <a:endParaRPr kumimoji="1" lang="ja-JP" altLang="en-US" sz="2800" dirty="0"/>
@@ -7225,7 +7189,7 @@
           <a:lstStyle/>
           <a:p>
             <a:r>
-              <a:rPr kumimoji="1" lang="en-US" altLang="ja-JP" sz="2800" dirty="0" smtClean="0"/>
+              <a:rPr kumimoji="1" lang="en-US" altLang="ja-JP" sz="2800" dirty="0"/>
               <a:t>F</a:t>
             </a:r>
             <a:endParaRPr kumimoji="1" lang="ja-JP" altLang="en-US" sz="2800" dirty="0"/>
@@ -7255,7 +7219,7 @@
           <a:lstStyle/>
           <a:p>
             <a:r>
-              <a:rPr lang="en-US" altLang="ja-JP" sz="2800" dirty="0" smtClean="0"/>
+              <a:rPr lang="en-US" altLang="ja-JP" sz="2800" dirty="0"/>
               <a:t>  x := x-1</a:t>
             </a:r>
           </a:p>
@@ -7413,7 +7377,7 @@
           <a:p>
             <a:pPr algn="ctr"/>
             <a:r>
-              <a:rPr kumimoji="1" lang="en-US" altLang="ja-JP" sz="2800" dirty="0" smtClean="0">
+              <a:rPr kumimoji="1" lang="en-US" altLang="ja-JP" sz="2800" dirty="0">
                 <a:solidFill>
                   <a:schemeClr val="tx1"/>
                 </a:solidFill>
@@ -7451,7 +7415,7 @@
           <a:lstStyle/>
           <a:p>
             <a:r>
-              <a:rPr kumimoji="1" lang="en-US" altLang="ja-JP" sz="2800" dirty="0" smtClean="0"/>
+              <a:rPr kumimoji="1" lang="en-US" altLang="ja-JP" sz="2800" dirty="0"/>
               <a:t>F</a:t>
             </a:r>
             <a:endParaRPr kumimoji="1" lang="ja-JP" altLang="en-US" sz="2800" dirty="0"/>
@@ -7481,7 +7445,7 @@
           <a:lstStyle/>
           <a:p>
             <a:r>
-              <a:rPr kumimoji="1" lang="en-US" altLang="ja-JP" sz="2800" dirty="0" smtClean="0"/>
+              <a:rPr kumimoji="1" lang="en-US" altLang="ja-JP" sz="2800" dirty="0"/>
               <a:t>T</a:t>
             </a:r>
             <a:endParaRPr kumimoji="1" lang="ja-JP" altLang="en-US" sz="2800" dirty="0"/>
@@ -7547,7 +7511,7 @@
           <a:lstStyle/>
           <a:p>
             <a:r>
-              <a:rPr lang="en-US" altLang="ja-JP" sz="2800" dirty="0" smtClean="0"/>
+              <a:rPr lang="en-US" altLang="ja-JP" sz="2800" dirty="0"/>
               <a:t>  z := z+1</a:t>
             </a:r>
           </a:p>
@@ -7809,7 +7773,7 @@
           <a:p>
             <a:pPr algn="ctr"/>
             <a:r>
-              <a:rPr kumimoji="1" lang="en-US" altLang="ja-JP" sz="2800" dirty="0" smtClean="0">
+              <a:rPr kumimoji="1" lang="en-US" altLang="ja-JP" sz="2800" dirty="0">
                 <a:solidFill>
                   <a:schemeClr val="tx1"/>
                 </a:solidFill>
@@ -7847,7 +7811,7 @@
           <a:lstStyle/>
           <a:p>
             <a:r>
-              <a:rPr kumimoji="1" lang="en-US" altLang="ja-JP" sz="2800" dirty="0" smtClean="0"/>
+              <a:rPr kumimoji="1" lang="en-US" altLang="ja-JP" sz="2800" dirty="0"/>
               <a:t>F</a:t>
             </a:r>
             <a:endParaRPr kumimoji="1" lang="ja-JP" altLang="en-US" sz="2800" dirty="0"/>
@@ -7877,7 +7841,7 @@
           <a:lstStyle/>
           <a:p>
             <a:r>
-              <a:rPr kumimoji="1" lang="en-US" altLang="ja-JP" sz="2800" dirty="0" smtClean="0"/>
+              <a:rPr kumimoji="1" lang="en-US" altLang="ja-JP" sz="2800" dirty="0"/>
               <a:t>T</a:t>
             </a:r>
             <a:endParaRPr kumimoji="1" lang="ja-JP" altLang="en-US" sz="2800" dirty="0"/>
@@ -7944,7 +7908,7 @@
           <a:lstStyle/>
           <a:p>
             <a:r>
-              <a:rPr lang="en-US" altLang="ja-JP" sz="2800" dirty="0" smtClean="0"/>
+              <a:rPr lang="en-US" altLang="ja-JP" sz="2800" dirty="0"/>
               <a:t>  y := y-1</a:t>
             </a:r>
           </a:p>
@@ -8319,7 +8283,7 @@
           <a:p>
             <a:pPr algn="ctr"/>
             <a:r>
-              <a:rPr kumimoji="1" lang="en-US" altLang="ja-JP" sz="2800" dirty="0" smtClean="0">
+              <a:rPr kumimoji="1" lang="en-US" altLang="ja-JP" sz="2800" dirty="0">
                 <a:solidFill>
                   <a:schemeClr val="tx1"/>
                 </a:solidFill>
@@ -8535,7 +8499,7 @@
           <a:lstStyle/>
           <a:p>
             <a:r>
-              <a:rPr kumimoji="1" lang="en-US" altLang="ja-JP" sz="2800" dirty="0" smtClean="0"/>
+              <a:rPr kumimoji="1" lang="en-US" altLang="ja-JP" sz="2800" dirty="0"/>
               <a:t>T</a:t>
             </a:r>
             <a:endParaRPr kumimoji="1" lang="ja-JP" altLang="en-US" sz="2800" dirty="0"/>
@@ -8565,7 +8529,7 @@
           <a:lstStyle/>
           <a:p>
             <a:r>
-              <a:rPr kumimoji="1" lang="en-US" altLang="ja-JP" sz="2800" dirty="0" smtClean="0"/>
+              <a:rPr kumimoji="1" lang="en-US" altLang="ja-JP" sz="2800" dirty="0"/>
               <a:t>F</a:t>
             </a:r>
             <a:endParaRPr kumimoji="1" lang="ja-JP" altLang="en-US" sz="2800" dirty="0"/>
@@ -8686,7 +8650,7 @@
           <a:lstStyle/>
           <a:p>
             <a:r>
-              <a:rPr lang="ja-JP" altLang="en-US" sz="2000" dirty="0" smtClean="0"/>
+              <a:rPr lang="ja-JP" altLang="en-US" sz="2000" dirty="0"/>
               <a:t>入口１つ出口２つ</a:t>
             </a:r>
             <a:endParaRPr kumimoji="1" lang="ja-JP" altLang="en-US" sz="2000" dirty="0"/>
@@ -8719,7 +8683,7 @@
           <a:lstStyle/>
           <a:p>
             <a:r>
-              <a:rPr lang="ja-JP" altLang="en-US" sz="2000" dirty="0" smtClean="0"/>
+              <a:rPr lang="ja-JP" altLang="en-US" sz="2000" dirty="0"/>
               <a:t>入口１つ出口２つ</a:t>
             </a:r>
             <a:endParaRPr kumimoji="1" lang="ja-JP" altLang="en-US" sz="2000" dirty="0"/>
@@ -8752,25 +8716,24 @@
           <a:lstStyle/>
           <a:p>
             <a:r>
-              <a:rPr kumimoji="1" lang="ja-JP" altLang="en-US" sz="2000" dirty="0" smtClean="0"/>
+              <a:rPr kumimoji="1" lang="ja-JP" altLang="en-US" sz="2000" dirty="0"/>
               <a:t>内側の</a:t>
             </a:r>
             <a:r>
-              <a:rPr kumimoji="1" lang="en-US" altLang="ja-JP" sz="2000" dirty="0" smtClean="0"/>
+              <a:rPr kumimoji="1" lang="en-US" altLang="ja-JP" sz="2000" dirty="0"/>
               <a:t>while</a:t>
             </a:r>
             <a:r>
-              <a:rPr lang="ja-JP" altLang="en-US" sz="2000" dirty="0" smtClean="0"/>
+              <a:rPr lang="ja-JP" altLang="en-US" sz="2000" dirty="0"/>
               <a:t>文は</a:t>
             </a:r>
-            <a:endParaRPr lang="en-US" altLang="ja-JP" sz="2000" dirty="0" smtClean="0"/>
-          </a:p>
-          <a:p>
-            <a:r>
-              <a:rPr kumimoji="1" lang="ja-JP" altLang="en-US" sz="2000" dirty="0" smtClean="0"/>
+            <a:endParaRPr lang="en-US" altLang="ja-JP" sz="2000" dirty="0"/>
+          </a:p>
+          <a:p>
+            <a:r>
+              <a:rPr kumimoji="1" lang="ja-JP" altLang="en-US" sz="2000" dirty="0"/>
               <a:t>入口２つ出口１つ</a:t>
             </a:r>
-            <a:endParaRPr kumimoji="1" lang="ja-JP" altLang="en-US" sz="2000" dirty="0"/>
           </a:p>
         </p:txBody>
       </p:sp>
@@ -9718,13 +9681,6 @@
   <p:clrMapOvr>
     <a:masterClrMapping/>
   </p:clrMapOvr>
-  <p:timing>
-    <p:tnLst>
-      <p:par>
-        <p:cTn xmlns:p14="http://schemas.microsoft.com/office/powerpoint/2010/main" id="1" dur="indefinite" restart="never" nodeType="tmRoot"/>
-      </p:par>
-    </p:tnLst>
-  </p:timing>
 </p:sld>
 </file>
 
@@ -9763,11 +9719,11 @@
           <a:lstStyle/>
           <a:p>
             <a:r>
-              <a:rPr kumimoji="1" lang="ja-JP" altLang="en-US" dirty="0" smtClean="0"/>
+              <a:rPr kumimoji="1" lang="ja-JP" altLang="en-US" dirty="0"/>
               <a:t>練習問題</a:t>
             </a:r>
             <a:r>
-              <a:rPr lang="ja-JP" altLang="en-US" dirty="0" smtClean="0"/>
+              <a:rPr lang="ja-JP" altLang="en-US" dirty="0"/>
               <a:t>１</a:t>
             </a:r>
             <a:endParaRPr kumimoji="1" lang="ja-JP" altLang="en-US" dirty="0"/>
@@ -9797,54 +9753,54 @@
           <a:lstStyle/>
           <a:p>
             <a:r>
-              <a:rPr lang="ja-JP" altLang="en-US" sz="2800" dirty="0" smtClean="0"/>
+              <a:rPr lang="ja-JP" altLang="en-US" sz="2800" dirty="0"/>
               <a:t>以下のプログラム断片の制御フローを図示せよ。</a:t>
             </a:r>
-            <a:endParaRPr lang="en-US" altLang="ja-JP" sz="2800" dirty="0" smtClean="0"/>
-          </a:p>
-          <a:p>
-            <a:r>
-              <a:rPr lang="en-US" altLang="ja-JP" sz="2800" b="1" dirty="0" smtClean="0"/>
+            <a:endParaRPr lang="en-US" altLang="ja-JP" sz="2800" dirty="0"/>
+          </a:p>
+          <a:p>
+            <a:r>
+              <a:rPr lang="en-US" altLang="ja-JP" sz="2800" b="1" dirty="0"/>
               <a:t>if </a:t>
             </a:r>
             <a:r>
-              <a:rPr lang="en-US" altLang="ja-JP" sz="2800" dirty="0" smtClean="0"/>
+              <a:rPr lang="en-US" altLang="ja-JP" sz="2800" dirty="0"/>
               <a:t>x &gt; 0 </a:t>
             </a:r>
             <a:r>
-              <a:rPr lang="en-US" altLang="ja-JP" sz="2800" b="1" dirty="0" smtClean="0"/>
+              <a:rPr lang="en-US" altLang="ja-JP" sz="2800" b="1" dirty="0"/>
               <a:t>then </a:t>
             </a:r>
             <a:r>
-              <a:rPr lang="en-US" altLang="ja-JP" sz="2800" dirty="0" smtClean="0"/>
+              <a:rPr lang="en-US" altLang="ja-JP" sz="2800" dirty="0"/>
               <a:t>x := x – 1</a:t>
             </a:r>
           </a:p>
           <a:p>
             <a:r>
-              <a:rPr lang="en-US" altLang="ja-JP" sz="2800" b="1" dirty="0" smtClean="0"/>
+              <a:rPr lang="en-US" altLang="ja-JP" sz="2800" b="1" dirty="0"/>
               <a:t>else if </a:t>
             </a:r>
             <a:r>
-              <a:rPr lang="en-US" altLang="ja-JP" sz="2800" dirty="0" smtClean="0"/>
+              <a:rPr lang="en-US" altLang="ja-JP" sz="2800" dirty="0"/>
               <a:t>y &gt; 0 </a:t>
             </a:r>
             <a:r>
-              <a:rPr lang="en-US" altLang="ja-JP" sz="2800" b="1" dirty="0" smtClean="0"/>
+              <a:rPr lang="en-US" altLang="ja-JP" sz="2800" b="1" dirty="0"/>
               <a:t>then </a:t>
             </a:r>
             <a:r>
-              <a:rPr lang="en-US" altLang="ja-JP" sz="2800" dirty="0" smtClean="0"/>
+              <a:rPr lang="en-US" altLang="ja-JP" sz="2800" dirty="0"/>
               <a:t>y := y – 1</a:t>
             </a:r>
           </a:p>
           <a:p>
             <a:r>
-              <a:rPr kumimoji="1" lang="en-US" altLang="ja-JP" sz="2800" b="1" dirty="0" smtClean="0"/>
+              <a:rPr kumimoji="1" lang="en-US" altLang="ja-JP" sz="2800" b="1" dirty="0"/>
               <a:t>        else </a:t>
             </a:r>
             <a:r>
-              <a:rPr kumimoji="1" lang="en-US" altLang="ja-JP" sz="2800" dirty="0" smtClean="0"/>
+              <a:rPr kumimoji="1" lang="en-US" altLang="ja-JP" sz="2800" dirty="0"/>
               <a:t>y := y + 1</a:t>
             </a:r>
             <a:endParaRPr kumimoji="1" lang="ja-JP" altLang="en-US" sz="2800" dirty="0"/>
@@ -9898,53 +9854,53 @@
           <a:lstStyle/>
           <a:p>
             <a:r>
-              <a:rPr lang="en-US" altLang="ja-JP" sz="2800" b="1" dirty="0" smtClean="0"/>
+              <a:rPr lang="en-US" altLang="ja-JP" sz="2800" b="1" dirty="0"/>
               <a:t>if </a:t>
             </a:r>
             <a:r>
-              <a:rPr lang="en-US" altLang="ja-JP" sz="2800" dirty="0" smtClean="0"/>
+              <a:rPr lang="en-US" altLang="ja-JP" sz="2800" dirty="0"/>
               <a:t>x &gt; 0 </a:t>
             </a:r>
             <a:r>
-              <a:rPr lang="en-US" altLang="ja-JP" sz="2800" b="1" dirty="0" smtClean="0"/>
+              <a:rPr lang="en-US" altLang="ja-JP" sz="2800" b="1" dirty="0"/>
               <a:t>then </a:t>
             </a:r>
             <a:r>
-              <a:rPr lang="en-US" altLang="ja-JP" sz="2800" dirty="0" smtClean="0"/>
+              <a:rPr lang="en-US" altLang="ja-JP" sz="2800" dirty="0"/>
               <a:t>x := x – 1</a:t>
             </a:r>
           </a:p>
           <a:p>
             <a:r>
-              <a:rPr lang="en-US" altLang="ja-JP" sz="2800" b="1" dirty="0" smtClean="0"/>
+              <a:rPr lang="en-US" altLang="ja-JP" sz="2800" b="1" dirty="0"/>
               <a:t>else if </a:t>
             </a:r>
             <a:r>
-              <a:rPr lang="en-US" altLang="ja-JP" sz="2800" dirty="0" smtClean="0"/>
+              <a:rPr lang="en-US" altLang="ja-JP" sz="2800" dirty="0"/>
               <a:t>y &gt; 0 </a:t>
             </a:r>
             <a:r>
-              <a:rPr lang="en-US" altLang="ja-JP" sz="2800" b="1" dirty="0" smtClean="0"/>
+              <a:rPr lang="en-US" altLang="ja-JP" sz="2800" b="1" dirty="0"/>
               <a:t>then </a:t>
             </a:r>
           </a:p>
           <a:p>
             <a:r>
-              <a:rPr lang="ja-JP" altLang="en-US" sz="2800" b="1" dirty="0" smtClean="0"/>
+              <a:rPr lang="ja-JP" altLang="en-US" sz="2800" b="1" dirty="0"/>
               <a:t>                </a:t>
             </a:r>
             <a:r>
-              <a:rPr lang="en-US" altLang="ja-JP" sz="2800" dirty="0" smtClean="0"/>
+              <a:rPr lang="en-US" altLang="ja-JP" sz="2800" dirty="0"/>
               <a:t>y := y – 1</a:t>
             </a:r>
           </a:p>
           <a:p>
             <a:r>
-              <a:rPr lang="en-US" altLang="ja-JP" sz="2800" b="1" dirty="0" smtClean="0"/>
+              <a:rPr lang="en-US" altLang="ja-JP" sz="2800" b="1" dirty="0"/>
               <a:t>        else </a:t>
             </a:r>
             <a:r>
-              <a:rPr lang="en-US" altLang="ja-JP" sz="2800" dirty="0" smtClean="0"/>
+              <a:rPr lang="en-US" altLang="ja-JP" sz="2800" dirty="0"/>
               <a:t>y := y + 1</a:t>
             </a:r>
             <a:endParaRPr lang="ja-JP" altLang="en-US" sz="2800" dirty="0"/>
@@ -9994,7 +9950,7 @@
           <a:p>
             <a:pPr algn="ctr"/>
             <a:r>
-              <a:rPr lang="en-US" altLang="ja-JP" sz="2800" dirty="0" smtClean="0">
+              <a:rPr lang="en-US" altLang="ja-JP" sz="2800" dirty="0">
                 <a:solidFill>
                   <a:schemeClr val="tx1"/>
                 </a:solidFill>
@@ -10106,7 +10062,7 @@
           <a:lstStyle/>
           <a:p>
             <a:r>
-              <a:rPr kumimoji="1" lang="en-US" altLang="ja-JP" sz="2800" dirty="0" smtClean="0"/>
+              <a:rPr kumimoji="1" lang="en-US" altLang="ja-JP" sz="2800" dirty="0"/>
               <a:t>T</a:t>
             </a:r>
             <a:endParaRPr kumimoji="1" lang="ja-JP" altLang="en-US" sz="2800" dirty="0"/>
@@ -10136,7 +10092,7 @@
           <a:lstStyle/>
           <a:p>
             <a:r>
-              <a:rPr kumimoji="1" lang="en-US" altLang="ja-JP" sz="2800" dirty="0" smtClean="0"/>
+              <a:rPr kumimoji="1" lang="en-US" altLang="ja-JP" sz="2800" dirty="0"/>
               <a:t>F</a:t>
             </a:r>
             <a:endParaRPr kumimoji="1" lang="ja-JP" altLang="en-US" sz="2800" dirty="0"/>
@@ -10166,7 +10122,7 @@
           <a:lstStyle/>
           <a:p>
             <a:r>
-              <a:rPr lang="en-US" altLang="ja-JP" sz="2800" dirty="0" smtClean="0"/>
+              <a:rPr lang="en-US" altLang="ja-JP" sz="2800" dirty="0"/>
               <a:t>  x := x-1</a:t>
             </a:r>
           </a:p>
@@ -10303,7 +10259,7 @@
           <a:lstStyle/>
           <a:p>
             <a:r>
-              <a:rPr lang="en-US" altLang="ja-JP" sz="2800" dirty="0" smtClean="0"/>
+              <a:rPr lang="en-US" altLang="ja-JP" sz="2800" dirty="0"/>
               <a:t>  y := y-1</a:t>
             </a:r>
           </a:p>
@@ -10352,7 +10308,7 @@
           <a:p>
             <a:pPr algn="ctr"/>
             <a:r>
-              <a:rPr lang="en-US" altLang="ja-JP" sz="2800" dirty="0" smtClean="0">
+              <a:rPr lang="en-US" altLang="ja-JP" sz="2800" dirty="0">
                 <a:solidFill>
                   <a:schemeClr val="tx1"/>
                 </a:solidFill>
@@ -10426,7 +10382,7 @@
           <a:lstStyle/>
           <a:p>
             <a:r>
-              <a:rPr kumimoji="1" lang="en-US" altLang="ja-JP" sz="2800" dirty="0" smtClean="0"/>
+              <a:rPr kumimoji="1" lang="en-US" altLang="ja-JP" sz="2800" dirty="0"/>
               <a:t>F</a:t>
             </a:r>
             <a:endParaRPr kumimoji="1" lang="ja-JP" altLang="en-US" sz="2800" dirty="0"/>
@@ -10527,7 +10483,7 @@
           <a:lstStyle/>
           <a:p>
             <a:r>
-              <a:rPr kumimoji="1" lang="en-US" altLang="ja-JP" sz="2800" dirty="0" smtClean="0"/>
+              <a:rPr kumimoji="1" lang="en-US" altLang="ja-JP" sz="2800" dirty="0"/>
               <a:t>T</a:t>
             </a:r>
             <a:endParaRPr kumimoji="1" lang="ja-JP" altLang="en-US" sz="2800" dirty="0"/>
@@ -10557,7 +10513,7 @@
           <a:lstStyle/>
           <a:p>
             <a:r>
-              <a:rPr lang="en-US" altLang="ja-JP" sz="2800" dirty="0" smtClean="0"/>
+              <a:rPr lang="en-US" altLang="ja-JP" sz="2800" dirty="0"/>
               <a:t>  y := y+1</a:t>
             </a:r>
           </a:p>
@@ -10801,7 +10757,7 @@
           <a:lstStyle/>
           <a:p>
             <a:r>
-              <a:rPr lang="ja-JP" altLang="en-US" dirty="0" smtClean="0"/>
+              <a:rPr lang="ja-JP" altLang="en-US" dirty="0"/>
               <a:t>解答例</a:t>
             </a:r>
             <a:endParaRPr kumimoji="1" lang="ja-JP" altLang="en-US" dirty="0"/>
@@ -10849,18 +10805,9 @@
           <a:lstStyle/>
           <a:p>
             <a:r>
-              <a:rPr kumimoji="1" lang="ja-JP" altLang="en-US" dirty="0" smtClean="0"/>
-              <a:t>練習</a:t>
-            </a:r>
-            <a:r>
-              <a:rPr kumimoji="1" lang="ja-JP" altLang="en-US" dirty="0" smtClean="0"/>
-              <a:t>問題</a:t>
-            </a:r>
-            <a:r>
-              <a:rPr kumimoji="1" lang="ja-JP" altLang="en-US" dirty="0" smtClean="0"/>
-              <a:t>２</a:t>
-            </a:r>
-            <a:endParaRPr kumimoji="1" lang="ja-JP" altLang="en-US" dirty="0"/>
+              <a:rPr kumimoji="1" lang="ja-JP" altLang="en-US" dirty="0"/>
+              <a:t>練習問題２</a:t>
+            </a:r>
           </a:p>
         </p:txBody>
       </p:sp>
@@ -10887,90 +10834,90 @@
           <a:lstStyle/>
           <a:p>
             <a:r>
-              <a:rPr lang="ja-JP" altLang="en-US" sz="2800" dirty="0" smtClean="0"/>
+              <a:rPr lang="ja-JP" altLang="en-US" sz="2800" dirty="0"/>
               <a:t>以下のプログラム断片の制御フローを図示せよ。</a:t>
             </a:r>
-            <a:endParaRPr lang="en-US" altLang="ja-JP" sz="2800" dirty="0" smtClean="0"/>
-          </a:p>
-          <a:p>
-            <a:r>
-              <a:rPr lang="en-US" altLang="ja-JP" sz="2800" dirty="0" smtClean="0"/>
+            <a:endParaRPr lang="en-US" altLang="ja-JP" sz="2800" dirty="0"/>
+          </a:p>
+          <a:p>
+            <a:r>
+              <a:rPr lang="en-US" altLang="ja-JP" sz="2800" dirty="0"/>
               <a:t>y := 3;</a:t>
             </a:r>
           </a:p>
           <a:p>
             <a:r>
-              <a:rPr lang="en-US" altLang="ja-JP" sz="2800" b="1" dirty="0" smtClean="0"/>
+              <a:rPr lang="en-US" altLang="ja-JP" sz="2800" b="1" dirty="0"/>
               <a:t>case</a:t>
             </a:r>
             <a:r>
-              <a:rPr lang="en-US" altLang="ja-JP" sz="2800" dirty="0" smtClean="0"/>
+              <a:rPr lang="en-US" altLang="ja-JP" sz="2800" dirty="0"/>
               <a:t> x </a:t>
             </a:r>
             <a:r>
-              <a:rPr lang="en-US" altLang="ja-JP" sz="2800" b="1" dirty="0" smtClean="0"/>
+              <a:rPr lang="en-US" altLang="ja-JP" sz="2800" b="1" dirty="0"/>
               <a:t>of</a:t>
             </a:r>
           </a:p>
           <a:p>
             <a:r>
-              <a:rPr lang="en-US" altLang="ja-JP" sz="2800" dirty="0" smtClean="0"/>
+              <a:rPr lang="en-US" altLang="ja-JP" sz="2800" dirty="0"/>
               <a:t>    1 : y := 1;</a:t>
             </a:r>
           </a:p>
           <a:p>
             <a:r>
-              <a:rPr lang="en-US" altLang="ja-JP" sz="2800" dirty="0" smtClean="0"/>
+              <a:rPr lang="en-US" altLang="ja-JP" sz="2800" dirty="0"/>
               <a:t>    2 : y := x * 2;</a:t>
             </a:r>
           </a:p>
           <a:p>
             <a:r>
-              <a:rPr lang="en-US" altLang="ja-JP" sz="2800" dirty="0" smtClean="0"/>
+              <a:rPr lang="en-US" altLang="ja-JP" sz="2800" dirty="0"/>
               <a:t>    3 : </a:t>
             </a:r>
             <a:r>
-              <a:rPr lang="en-US" altLang="ja-JP" sz="2800" b="1" dirty="0" smtClean="0"/>
+              <a:rPr lang="en-US" altLang="ja-JP" sz="2800" b="1" dirty="0"/>
               <a:t>if</a:t>
             </a:r>
             <a:r>
-              <a:rPr lang="en-US" altLang="ja-JP" sz="2800" dirty="0" smtClean="0"/>
+              <a:rPr lang="en-US" altLang="ja-JP" sz="2800" dirty="0"/>
               <a:t> z = 0 </a:t>
             </a:r>
             <a:r>
-              <a:rPr lang="en-US" altLang="ja-JP" sz="2800" b="1" dirty="0" smtClean="0"/>
+              <a:rPr lang="en-US" altLang="ja-JP" sz="2800" b="1" dirty="0"/>
               <a:t>then</a:t>
             </a:r>
           </a:p>
           <a:p>
             <a:r>
-              <a:rPr lang="en-US" altLang="ja-JP" sz="2800" dirty="0" smtClean="0"/>
+              <a:rPr lang="en-US" altLang="ja-JP" sz="2800" dirty="0"/>
               <a:t>              y := y * y</a:t>
             </a:r>
           </a:p>
           <a:p>
             <a:r>
-              <a:rPr lang="en-US" altLang="ja-JP" sz="2800" dirty="0" smtClean="0"/>
+              <a:rPr lang="en-US" altLang="ja-JP" sz="2800" dirty="0"/>
               <a:t>         </a:t>
             </a:r>
             <a:r>
-              <a:rPr lang="en-US" altLang="ja-JP" sz="2800" b="1" dirty="0" smtClean="0"/>
+              <a:rPr lang="en-US" altLang="ja-JP" sz="2800" b="1" dirty="0"/>
               <a:t>else</a:t>
             </a:r>
             <a:r>
-              <a:rPr lang="en-US" altLang="ja-JP" sz="2800" dirty="0" smtClean="0"/>
+              <a:rPr lang="en-US" altLang="ja-JP" sz="2800" dirty="0"/>
               <a:t> </a:t>
             </a:r>
           </a:p>
           <a:p>
             <a:r>
-              <a:rPr lang="en-US" altLang="ja-JP" sz="2800" dirty="0" smtClean="0"/>
+              <a:rPr lang="en-US" altLang="ja-JP" sz="2800" dirty="0"/>
               <a:t>              y := y * y * y</a:t>
             </a:r>
           </a:p>
           <a:p>
             <a:r>
-              <a:rPr lang="en-US" altLang="ja-JP" sz="2800" b="1" dirty="0" smtClean="0"/>
+              <a:rPr lang="en-US" altLang="ja-JP" sz="2800" b="1" dirty="0"/>
               <a:t>end</a:t>
             </a:r>
           </a:p>
@@ -11017,10 +10964,9 @@
           <a:lstStyle/>
           <a:p>
             <a:r>
-              <a:rPr kumimoji="1" lang="ja-JP" altLang="en-US" dirty="0" smtClean="0"/>
+              <a:rPr kumimoji="1" lang="ja-JP" altLang="en-US" dirty="0"/>
               <a:t>解答例</a:t>
             </a:r>
-            <a:endParaRPr kumimoji="1" lang="ja-JP" altLang="en-US" dirty="0"/>
           </a:p>
         </p:txBody>
       </p:sp>
@@ -11046,83 +10992,83 @@
           <a:lstStyle/>
           <a:p>
             <a:r>
-              <a:rPr lang="en-US" altLang="ja-JP" sz="2400" dirty="0" smtClean="0"/>
+              <a:rPr lang="en-US" altLang="ja-JP" sz="2400" dirty="0"/>
               <a:t>y := 3;</a:t>
             </a:r>
           </a:p>
           <a:p>
             <a:r>
-              <a:rPr lang="en-US" altLang="ja-JP" sz="2400" b="1" dirty="0" smtClean="0"/>
+              <a:rPr lang="en-US" altLang="ja-JP" sz="2400" b="1" dirty="0"/>
               <a:t>case</a:t>
             </a:r>
             <a:r>
-              <a:rPr lang="en-US" altLang="ja-JP" sz="2400" dirty="0" smtClean="0"/>
+              <a:rPr lang="en-US" altLang="ja-JP" sz="2400" dirty="0"/>
               <a:t> x </a:t>
             </a:r>
             <a:r>
-              <a:rPr lang="en-US" altLang="ja-JP" sz="2400" b="1" dirty="0" smtClean="0"/>
+              <a:rPr lang="en-US" altLang="ja-JP" sz="2400" b="1" dirty="0"/>
               <a:t>of</a:t>
             </a:r>
           </a:p>
           <a:p>
             <a:r>
-              <a:rPr lang="en-US" altLang="ja-JP" sz="2400" dirty="0" smtClean="0"/>
+              <a:rPr lang="en-US" altLang="ja-JP" sz="2400" dirty="0"/>
               <a:t>    1 : y := 1;</a:t>
             </a:r>
           </a:p>
           <a:p>
             <a:r>
-              <a:rPr lang="en-US" altLang="ja-JP" sz="2400" dirty="0" smtClean="0"/>
+              <a:rPr lang="en-US" altLang="ja-JP" sz="2400" dirty="0"/>
               <a:t>    2 : y := x * 2;</a:t>
             </a:r>
           </a:p>
           <a:p>
             <a:r>
-              <a:rPr lang="en-US" altLang="ja-JP" sz="2400" dirty="0" smtClean="0"/>
+              <a:rPr lang="en-US" altLang="ja-JP" sz="2400" dirty="0"/>
               <a:t>    3 : </a:t>
             </a:r>
             <a:r>
-              <a:rPr lang="en-US" altLang="ja-JP" sz="2400" b="1" dirty="0" smtClean="0"/>
+              <a:rPr lang="en-US" altLang="ja-JP" sz="2400" b="1" dirty="0"/>
               <a:t>if</a:t>
             </a:r>
             <a:r>
-              <a:rPr lang="en-US" altLang="ja-JP" sz="2400" dirty="0" smtClean="0"/>
+              <a:rPr lang="en-US" altLang="ja-JP" sz="2400" dirty="0"/>
               <a:t> z = 0 </a:t>
             </a:r>
             <a:r>
-              <a:rPr lang="en-US" altLang="ja-JP" sz="2400" b="1" dirty="0" smtClean="0"/>
+              <a:rPr lang="en-US" altLang="ja-JP" sz="2400" b="1" dirty="0"/>
               <a:t>then</a:t>
             </a:r>
           </a:p>
           <a:p>
             <a:r>
-              <a:rPr lang="en-US" altLang="ja-JP" sz="2400" dirty="0" smtClean="0"/>
+              <a:rPr lang="en-US" altLang="ja-JP" sz="2400" dirty="0"/>
               <a:t>              y := y * y</a:t>
             </a:r>
           </a:p>
           <a:p>
             <a:r>
-              <a:rPr lang="en-US" altLang="ja-JP" sz="2400" dirty="0" smtClean="0"/>
+              <a:rPr lang="en-US" altLang="ja-JP" sz="2400" dirty="0"/>
               <a:t>         </a:t>
             </a:r>
             <a:r>
-              <a:rPr lang="en-US" altLang="ja-JP" sz="2400" b="1" dirty="0" smtClean="0"/>
+              <a:rPr lang="en-US" altLang="ja-JP" sz="2400" b="1" dirty="0"/>
               <a:t>else</a:t>
             </a:r>
             <a:r>
-              <a:rPr lang="en-US" altLang="ja-JP" sz="2400" dirty="0" smtClean="0"/>
+              <a:rPr lang="en-US" altLang="ja-JP" sz="2400" dirty="0"/>
               <a:t> </a:t>
             </a:r>
           </a:p>
           <a:p>
             <a:r>
-              <a:rPr lang="en-US" altLang="ja-JP" sz="2400" dirty="0" smtClean="0"/>
+              <a:rPr lang="en-US" altLang="ja-JP" sz="2400" dirty="0"/>
               <a:t>              y := y * y * y</a:t>
             </a:r>
           </a:p>
           <a:p>
             <a:r>
-              <a:rPr lang="en-US" altLang="ja-JP" sz="2400" b="1" dirty="0" smtClean="0"/>
+              <a:rPr lang="en-US" altLang="ja-JP" sz="2400" b="1" dirty="0"/>
               <a:t>end</a:t>
             </a:r>
           </a:p>
@@ -11151,7 +11097,7 @@
           <a:lstStyle/>
           <a:p>
             <a:r>
-              <a:rPr kumimoji="1" lang="en-US" altLang="ja-JP" sz="2800" dirty="0" smtClean="0"/>
+              <a:rPr kumimoji="1" lang="en-US" altLang="ja-JP" sz="2800" dirty="0"/>
               <a:t> y := 3</a:t>
             </a:r>
             <a:endParaRPr kumimoji="1" lang="ja-JP" altLang="en-US" sz="2800" dirty="0"/>
@@ -11309,7 +11255,7 @@
           <a:p>
             <a:pPr algn="ctr"/>
             <a:r>
-              <a:rPr lang="en-US" altLang="ja-JP" sz="2800" dirty="0" smtClean="0">
+              <a:rPr lang="en-US" altLang="ja-JP" sz="2800" dirty="0">
                 <a:solidFill>
                   <a:schemeClr val="tx1"/>
                 </a:solidFill>
@@ -11388,7 +11334,7 @@
           <a:lstStyle/>
           <a:p>
             <a:r>
-              <a:rPr lang="en-US" altLang="ja-JP" sz="2800" dirty="0" smtClean="0"/>
+              <a:rPr lang="en-US" altLang="ja-JP" sz="2800" dirty="0"/>
               <a:t>y := 1</a:t>
             </a:r>
           </a:p>
@@ -11420,7 +11366,7 @@
           <a:lstStyle/>
           <a:p>
             <a:r>
-              <a:rPr lang="en-US" altLang="ja-JP" sz="2800" dirty="0" smtClean="0"/>
+              <a:rPr lang="en-US" altLang="ja-JP" sz="2800" dirty="0"/>
               <a:t> y := y*y</a:t>
             </a:r>
           </a:p>
@@ -11449,7 +11395,7 @@
           <a:lstStyle/>
           <a:p>
             <a:r>
-              <a:rPr kumimoji="1" lang="en-US" altLang="ja-JP" sz="2800" dirty="0" smtClean="0"/>
+              <a:rPr kumimoji="1" lang="en-US" altLang="ja-JP" sz="2800" dirty="0"/>
               <a:t>1</a:t>
             </a:r>
             <a:endParaRPr kumimoji="1" lang="ja-JP" altLang="en-US" sz="2800" dirty="0"/>
@@ -11479,7 +11425,7 @@
           <a:lstStyle/>
           <a:p>
             <a:r>
-              <a:rPr lang="en-US" altLang="ja-JP" sz="2800" dirty="0" smtClean="0"/>
+              <a:rPr lang="en-US" altLang="ja-JP" sz="2800" dirty="0"/>
               <a:t>3</a:t>
             </a:r>
             <a:endParaRPr kumimoji="1" lang="ja-JP" altLang="en-US" sz="2800" dirty="0"/>
@@ -11529,7 +11475,7 @@
           <a:p>
             <a:pPr algn="ctr"/>
             <a:r>
-              <a:rPr kumimoji="1" lang="en-US" altLang="ja-JP" sz="2800" dirty="0" smtClean="0">
+              <a:rPr kumimoji="1" lang="en-US" altLang="ja-JP" sz="2800" dirty="0">
                 <a:solidFill>
                   <a:schemeClr val="tx1"/>
                 </a:solidFill>
@@ -11642,7 +11588,7 @@
           <a:lstStyle/>
           <a:p>
             <a:r>
-              <a:rPr kumimoji="1" lang="en-US" altLang="ja-JP" sz="2800" dirty="0" smtClean="0"/>
+              <a:rPr kumimoji="1" lang="en-US" altLang="ja-JP" sz="2800" dirty="0"/>
               <a:t>2</a:t>
             </a:r>
             <a:endParaRPr kumimoji="1" lang="ja-JP" altLang="en-US" sz="2800" dirty="0"/>
@@ -11672,7 +11618,7 @@
           <a:lstStyle/>
           <a:p>
             <a:r>
-              <a:rPr lang="en-US" altLang="ja-JP" sz="2800" dirty="0" smtClean="0"/>
+              <a:rPr lang="en-US" altLang="ja-JP" sz="2800" dirty="0"/>
               <a:t>  y := x*2 </a:t>
             </a:r>
           </a:p>
@@ -11886,7 +11832,7 @@
           <a:lstStyle/>
           <a:p>
             <a:r>
-              <a:rPr lang="en-US" altLang="ja-JP" sz="2800" dirty="0" smtClean="0"/>
+              <a:rPr lang="en-US" altLang="ja-JP" sz="2800" dirty="0"/>
               <a:t> y := y*y*y</a:t>
             </a:r>
           </a:p>
@@ -12022,7 +11968,7 @@
           <a:lstStyle/>
           <a:p>
             <a:r>
-              <a:rPr kumimoji="1" lang="en-US" altLang="ja-JP" sz="2800" dirty="0" smtClean="0"/>
+              <a:rPr kumimoji="1" lang="en-US" altLang="ja-JP" sz="2800" dirty="0"/>
               <a:t>T</a:t>
             </a:r>
             <a:endParaRPr kumimoji="1" lang="ja-JP" altLang="en-US" sz="2800" dirty="0"/>
@@ -12052,7 +11998,7 @@
           <a:lstStyle/>
           <a:p>
             <a:r>
-              <a:rPr kumimoji="1" lang="en-US" altLang="ja-JP" sz="2800" dirty="0" smtClean="0"/>
+              <a:rPr kumimoji="1" lang="en-US" altLang="ja-JP" sz="2800" dirty="0"/>
               <a:t>F</a:t>
             </a:r>
             <a:endParaRPr kumimoji="1" lang="ja-JP" altLang="en-US" sz="2800" dirty="0"/>
@@ -12279,18 +12225,9 @@
           <a:lstStyle/>
           <a:p>
             <a:r>
-              <a:rPr kumimoji="1" lang="ja-JP" altLang="en-US" dirty="0" smtClean="0"/>
-              <a:t>練習</a:t>
-            </a:r>
-            <a:r>
-              <a:rPr kumimoji="1" lang="ja-JP" altLang="en-US" dirty="0" smtClean="0"/>
-              <a:t>問題</a:t>
-            </a:r>
-            <a:r>
-              <a:rPr kumimoji="1" lang="ja-JP" altLang="en-US" dirty="0" smtClean="0"/>
-              <a:t>３</a:t>
-            </a:r>
-            <a:endParaRPr kumimoji="1" lang="ja-JP" altLang="en-US" dirty="0"/>
+              <a:rPr kumimoji="1" lang="ja-JP" altLang="en-US" dirty="0"/>
+              <a:t>練習問題３</a:t>
+            </a:r>
           </a:p>
         </p:txBody>
       </p:sp>
@@ -12317,75 +12254,75 @@
           <a:lstStyle/>
           <a:p>
             <a:r>
-              <a:rPr lang="ja-JP" altLang="en-US" sz="2800" dirty="0" smtClean="0"/>
+              <a:rPr lang="ja-JP" altLang="en-US" sz="2800" dirty="0"/>
               <a:t>以下のプログラム断片の制御フローを図示せよ。</a:t>
             </a:r>
-            <a:endParaRPr lang="en-US" altLang="ja-JP" sz="2800" dirty="0" smtClean="0"/>
-          </a:p>
-          <a:p>
-            <a:r>
-              <a:rPr lang="en-US" altLang="ja-JP" sz="2800" b="1" dirty="0" smtClean="0"/>
+            <a:endParaRPr lang="en-US" altLang="ja-JP" sz="2800" dirty="0"/>
+          </a:p>
+          <a:p>
+            <a:r>
+              <a:rPr lang="en-US" altLang="ja-JP" sz="2800" b="1" dirty="0"/>
               <a:t>while</a:t>
             </a:r>
             <a:r>
-              <a:rPr lang="en-US" altLang="ja-JP" sz="2800" dirty="0" smtClean="0"/>
+              <a:rPr lang="en-US" altLang="ja-JP" sz="2800" dirty="0"/>
               <a:t> x&gt;0  </a:t>
             </a:r>
             <a:r>
-              <a:rPr lang="en-US" altLang="ja-JP" sz="2800" b="1" dirty="0" smtClean="0"/>
+              <a:rPr lang="en-US" altLang="ja-JP" sz="2800" b="1" dirty="0"/>
               <a:t>do</a:t>
             </a:r>
           </a:p>
           <a:p>
             <a:r>
-              <a:rPr lang="en-US" altLang="ja-JP" sz="2800" b="1" dirty="0" smtClean="0"/>
+              <a:rPr lang="en-US" altLang="ja-JP" sz="2800" b="1" dirty="0"/>
               <a:t>    begin</a:t>
             </a:r>
           </a:p>
           <a:p>
             <a:r>
-              <a:rPr lang="en-US" altLang="ja-JP" sz="2800" dirty="0" smtClean="0"/>
+              <a:rPr lang="en-US" altLang="ja-JP" sz="2800" dirty="0"/>
               <a:t>        </a:t>
             </a:r>
             <a:r>
-              <a:rPr lang="en-US" altLang="ja-JP" sz="2800" b="1" dirty="0" smtClean="0"/>
+              <a:rPr lang="en-US" altLang="ja-JP" sz="2800" b="1" dirty="0"/>
               <a:t>if</a:t>
             </a:r>
             <a:r>
-              <a:rPr lang="en-US" altLang="ja-JP" sz="2800" dirty="0" smtClean="0"/>
+              <a:rPr lang="en-US" altLang="ja-JP" sz="2800" dirty="0"/>
               <a:t> x=3 </a:t>
             </a:r>
             <a:r>
-              <a:rPr lang="en-US" altLang="ja-JP" sz="2800" b="1" dirty="0" smtClean="0"/>
+              <a:rPr lang="en-US" altLang="ja-JP" sz="2800" b="1" dirty="0"/>
               <a:t>then</a:t>
             </a:r>
           </a:p>
           <a:p>
             <a:r>
-              <a:rPr kumimoji="1" lang="en-US" altLang="ja-JP" sz="2800" dirty="0" smtClean="0"/>
+              <a:rPr kumimoji="1" lang="en-US" altLang="ja-JP" sz="2800" dirty="0"/>
               <a:t>            break;</a:t>
             </a:r>
-            <a:endParaRPr lang="en-US" altLang="ja-JP" sz="2800" b="1" dirty="0" smtClean="0"/>
-          </a:p>
-          <a:p>
-            <a:r>
-              <a:rPr kumimoji="1" lang="en-US" altLang="ja-JP" sz="2800" dirty="0" smtClean="0"/>
+            <a:endParaRPr lang="en-US" altLang="ja-JP" sz="2800" b="1" dirty="0"/>
+          </a:p>
+          <a:p>
+            <a:r>
+              <a:rPr kumimoji="1" lang="en-US" altLang="ja-JP" sz="2800" dirty="0"/>
               <a:t>        y := y + 1;</a:t>
             </a:r>
           </a:p>
           <a:p>
             <a:r>
-              <a:rPr kumimoji="1" lang="en-US" altLang="ja-JP" sz="2800" dirty="0" smtClean="0"/>
+              <a:rPr kumimoji="1" lang="en-US" altLang="ja-JP" sz="2800" dirty="0"/>
               <a:t>        x := x - 1</a:t>
             </a:r>
           </a:p>
           <a:p>
             <a:r>
-              <a:rPr lang="en-US" altLang="ja-JP" sz="2800" dirty="0" smtClean="0"/>
+              <a:rPr lang="en-US" altLang="ja-JP" sz="2800" dirty="0"/>
               <a:t>   </a:t>
             </a:r>
             <a:r>
-              <a:rPr lang="en-US" altLang="ja-JP" sz="2800" b="1" dirty="0" smtClean="0"/>
+              <a:rPr lang="en-US" altLang="ja-JP" sz="2800" b="1" dirty="0"/>
               <a:t> end</a:t>
             </a:r>
             <a:endParaRPr kumimoji="1" lang="ja-JP" altLang="en-US" sz="2800" b="1" dirty="0"/>
@@ -12460,7 +12397,7 @@
           <a:p>
             <a:pPr algn="ctr"/>
             <a:r>
-              <a:rPr lang="en-US" altLang="ja-JP" sz="2800" dirty="0" smtClean="0">
+              <a:rPr lang="en-US" altLang="ja-JP" sz="2800" dirty="0">
                 <a:solidFill>
                   <a:schemeClr val="tx1"/>
                 </a:solidFill>
@@ -12534,7 +12471,7 @@
           <a:lstStyle/>
           <a:p>
             <a:r>
-              <a:rPr kumimoji="1" lang="en-US" altLang="ja-JP" sz="2800" dirty="0" smtClean="0"/>
+              <a:rPr kumimoji="1" lang="en-US" altLang="ja-JP" sz="2800" dirty="0"/>
               <a:t>T</a:t>
             </a:r>
             <a:endParaRPr kumimoji="1" lang="ja-JP" altLang="en-US" sz="2800" dirty="0"/>
@@ -12564,7 +12501,7 @@
           <a:lstStyle/>
           <a:p>
             <a:r>
-              <a:rPr kumimoji="1" lang="en-US" altLang="ja-JP" sz="2800" dirty="0" smtClean="0"/>
+              <a:rPr kumimoji="1" lang="en-US" altLang="ja-JP" sz="2800" dirty="0"/>
               <a:t>F</a:t>
             </a:r>
             <a:endParaRPr kumimoji="1" lang="ja-JP" altLang="en-US" sz="2800" dirty="0"/>
@@ -12594,7 +12531,7 @@
           <a:lstStyle/>
           <a:p>
             <a:r>
-              <a:rPr lang="en-US" altLang="ja-JP" sz="2800" dirty="0" smtClean="0"/>
+              <a:rPr lang="en-US" altLang="ja-JP" sz="2800" dirty="0"/>
               <a:t>  x := x-1</a:t>
             </a:r>
           </a:p>
@@ -12732,7 +12669,7 @@
           <a:lstStyle/>
           <a:p>
             <a:r>
-              <a:rPr lang="ja-JP" altLang="en-US" dirty="0" smtClean="0"/>
+              <a:rPr lang="ja-JP" altLang="en-US" dirty="0"/>
               <a:t>解答例</a:t>
             </a:r>
             <a:endParaRPr kumimoji="1" lang="ja-JP" altLang="en-US" dirty="0"/>
@@ -12782,7 +12719,7 @@
           <a:p>
             <a:pPr algn="ctr"/>
             <a:r>
-              <a:rPr lang="en-US" altLang="ja-JP" sz="2800" dirty="0" smtClean="0">
+              <a:rPr lang="en-US" altLang="ja-JP" sz="2800" dirty="0">
                 <a:solidFill>
                   <a:schemeClr val="tx1"/>
                 </a:solidFill>
@@ -12820,7 +12757,7 @@
           <a:lstStyle/>
           <a:p>
             <a:r>
-              <a:rPr kumimoji="1" lang="en-US" altLang="ja-JP" sz="2800" dirty="0" smtClean="0"/>
+              <a:rPr kumimoji="1" lang="en-US" altLang="ja-JP" sz="2800" dirty="0"/>
               <a:t>F</a:t>
             </a:r>
             <a:endParaRPr kumimoji="1" lang="ja-JP" altLang="en-US" sz="2800" dirty="0"/>
@@ -12886,7 +12823,7 @@
           <a:lstStyle/>
           <a:p>
             <a:r>
-              <a:rPr kumimoji="1" lang="en-US" altLang="ja-JP" sz="2800" dirty="0" smtClean="0"/>
+              <a:rPr kumimoji="1" lang="en-US" altLang="ja-JP" sz="2800" dirty="0"/>
               <a:t>T</a:t>
             </a:r>
             <a:endParaRPr kumimoji="1" lang="ja-JP" altLang="en-US" sz="2800" dirty="0"/>
@@ -12989,7 +12926,7 @@
           <a:lstStyle/>
           <a:p>
             <a:r>
-              <a:rPr lang="en-US" altLang="ja-JP" sz="2800" dirty="0" smtClean="0"/>
+              <a:rPr lang="en-US" altLang="ja-JP" sz="2800" dirty="0"/>
               <a:t>  y := y+1</a:t>
             </a:r>
           </a:p>
@@ -13052,68 +12989,68 @@
           <a:lstStyle/>
           <a:p>
             <a:r>
-              <a:rPr lang="en-US" altLang="ja-JP" sz="2400" b="1" dirty="0" smtClean="0"/>
+              <a:rPr lang="en-US" altLang="ja-JP" sz="2400" b="1" dirty="0"/>
               <a:t>while</a:t>
             </a:r>
             <a:r>
-              <a:rPr lang="en-US" altLang="ja-JP" sz="2400" dirty="0" smtClean="0"/>
+              <a:rPr lang="en-US" altLang="ja-JP" sz="2400" dirty="0"/>
               <a:t> x&gt;0  </a:t>
             </a:r>
             <a:r>
-              <a:rPr lang="en-US" altLang="ja-JP" sz="2400" b="1" dirty="0" smtClean="0"/>
+              <a:rPr lang="en-US" altLang="ja-JP" sz="2400" b="1" dirty="0"/>
               <a:t>do</a:t>
             </a:r>
           </a:p>
           <a:p>
             <a:r>
-              <a:rPr lang="en-US" altLang="ja-JP" sz="2400" b="1" dirty="0" smtClean="0"/>
+              <a:rPr lang="en-US" altLang="ja-JP" sz="2400" b="1" dirty="0"/>
               <a:t>    begin</a:t>
             </a:r>
           </a:p>
           <a:p>
             <a:r>
-              <a:rPr lang="en-US" altLang="ja-JP" sz="2400" dirty="0" smtClean="0"/>
+              <a:rPr lang="en-US" altLang="ja-JP" sz="2400" dirty="0"/>
               <a:t>        </a:t>
             </a:r>
             <a:r>
-              <a:rPr lang="en-US" altLang="ja-JP" sz="2400" b="1" dirty="0" smtClean="0"/>
+              <a:rPr lang="en-US" altLang="ja-JP" sz="2400" b="1" dirty="0"/>
               <a:t>if</a:t>
             </a:r>
             <a:r>
-              <a:rPr lang="en-US" altLang="ja-JP" sz="2400" dirty="0" smtClean="0"/>
+              <a:rPr lang="en-US" altLang="ja-JP" sz="2400" dirty="0"/>
               <a:t> x=3 </a:t>
             </a:r>
             <a:r>
-              <a:rPr lang="en-US" altLang="ja-JP" sz="2400" b="1" dirty="0" smtClean="0"/>
+              <a:rPr lang="en-US" altLang="ja-JP" sz="2400" b="1" dirty="0"/>
               <a:t>then</a:t>
             </a:r>
           </a:p>
           <a:p>
             <a:r>
-              <a:rPr lang="en-US" altLang="ja-JP" sz="2400" dirty="0" smtClean="0"/>
+              <a:rPr lang="en-US" altLang="ja-JP" sz="2400" dirty="0"/>
               <a:t>            break;</a:t>
             </a:r>
-            <a:endParaRPr lang="en-US" altLang="ja-JP" sz="2400" b="1" dirty="0" smtClean="0"/>
-          </a:p>
-          <a:p>
-            <a:r>
-              <a:rPr lang="en-US" altLang="ja-JP" sz="2400" dirty="0" smtClean="0"/>
+            <a:endParaRPr lang="en-US" altLang="ja-JP" sz="2400" b="1" dirty="0"/>
+          </a:p>
+          <a:p>
+            <a:r>
+              <a:rPr lang="en-US" altLang="ja-JP" sz="2400" dirty="0"/>
               <a:t>        y := y + 1;</a:t>
             </a:r>
           </a:p>
           <a:p>
             <a:r>
-              <a:rPr lang="en-US" altLang="ja-JP" sz="2400" dirty="0" smtClean="0"/>
+              <a:rPr lang="en-US" altLang="ja-JP" sz="2400" dirty="0"/>
               <a:t>        x := x - 1</a:t>
             </a:r>
           </a:p>
           <a:p>
             <a:r>
-              <a:rPr lang="en-US" altLang="ja-JP" sz="2400" dirty="0" smtClean="0"/>
+              <a:rPr lang="en-US" altLang="ja-JP" sz="2400" dirty="0"/>
               <a:t>   </a:t>
             </a:r>
             <a:r>
-              <a:rPr lang="en-US" altLang="ja-JP" sz="2400" b="1" dirty="0" smtClean="0"/>
+              <a:rPr lang="en-US" altLang="ja-JP" sz="2400" b="1" dirty="0"/>
               <a:t> end</a:t>
             </a:r>
             <a:endParaRPr lang="ja-JP" altLang="en-US" sz="2400" b="1" dirty="0"/>
@@ -13304,18 +13241,9 @@
           <a:lstStyle/>
           <a:p>
             <a:r>
-              <a:rPr kumimoji="1" lang="ja-JP" altLang="en-US" dirty="0" smtClean="0"/>
-              <a:t>練習</a:t>
-            </a:r>
-            <a:r>
-              <a:rPr kumimoji="1" lang="ja-JP" altLang="en-US" dirty="0" smtClean="0"/>
-              <a:t>問題</a:t>
-            </a:r>
-            <a:r>
-              <a:rPr kumimoji="1" lang="ja-JP" altLang="en-US" dirty="0" smtClean="0"/>
-              <a:t>４</a:t>
-            </a:r>
-            <a:endParaRPr kumimoji="1" lang="ja-JP" altLang="en-US" dirty="0"/>
+              <a:rPr kumimoji="1" lang="ja-JP" altLang="en-US" dirty="0"/>
+              <a:t>練習問題４</a:t>
+            </a:r>
           </a:p>
         </p:txBody>
       </p:sp>
@@ -13342,130 +13270,130 @@
           <a:lstStyle/>
           <a:p>
             <a:r>
-              <a:rPr lang="ja-JP" altLang="en-US" sz="2800" dirty="0" smtClean="0"/>
+              <a:rPr lang="ja-JP" altLang="en-US" sz="2800" dirty="0"/>
               <a:t>以下のプログラム断片の制御フローを図示せよ。</a:t>
             </a:r>
-            <a:endParaRPr lang="en-US" altLang="ja-JP" sz="2800" dirty="0" smtClean="0"/>
-          </a:p>
-          <a:p>
-            <a:r>
-              <a:rPr lang="en-US" altLang="ja-JP" sz="2800" b="1" dirty="0" smtClean="0"/>
+            <a:endParaRPr lang="en-US" altLang="ja-JP" sz="2800" dirty="0"/>
+          </a:p>
+          <a:p>
+            <a:r>
+              <a:rPr lang="en-US" altLang="ja-JP" sz="2800" b="1" dirty="0"/>
               <a:t>while</a:t>
             </a:r>
             <a:r>
-              <a:rPr lang="en-US" altLang="ja-JP" sz="2800" dirty="0" smtClean="0"/>
+              <a:rPr lang="en-US" altLang="ja-JP" sz="2800" dirty="0"/>
               <a:t> x&gt;0 </a:t>
             </a:r>
             <a:r>
-              <a:rPr lang="en-US" altLang="ja-JP" sz="2800" b="1" dirty="0" smtClean="0"/>
+              <a:rPr lang="en-US" altLang="ja-JP" sz="2800" b="1" dirty="0"/>
               <a:t>do</a:t>
             </a:r>
           </a:p>
           <a:p>
             <a:r>
-              <a:rPr lang="en-US" altLang="ja-JP" sz="2800" b="1" dirty="0" smtClean="0"/>
+              <a:rPr lang="en-US" altLang="ja-JP" sz="2800" b="1" dirty="0"/>
               <a:t>    begin</a:t>
             </a:r>
           </a:p>
           <a:p>
             <a:r>
-              <a:rPr lang="en-US" altLang="ja-JP" sz="2800" b="1" dirty="0" smtClean="0"/>
+              <a:rPr lang="en-US" altLang="ja-JP" sz="2800" b="1" dirty="0"/>
               <a:t>        while </a:t>
             </a:r>
             <a:r>
-              <a:rPr lang="en-US" altLang="ja-JP" sz="2800" dirty="0" smtClean="0"/>
+              <a:rPr lang="en-US" altLang="ja-JP" sz="2800" dirty="0"/>
               <a:t>y&gt;0</a:t>
             </a:r>
             <a:r>
-              <a:rPr lang="en-US" altLang="ja-JP" sz="2800" b="1" dirty="0" smtClean="0"/>
+              <a:rPr lang="en-US" altLang="ja-JP" sz="2800" b="1" dirty="0"/>
               <a:t> do</a:t>
             </a:r>
           </a:p>
           <a:p>
             <a:r>
-              <a:rPr lang="en-US" altLang="ja-JP" sz="2800" dirty="0" smtClean="0"/>
+              <a:rPr lang="en-US" altLang="ja-JP" sz="2800" dirty="0"/>
               <a:t>            </a:t>
             </a:r>
             <a:r>
-              <a:rPr lang="en-US" altLang="ja-JP" sz="2800" b="1" dirty="0" smtClean="0"/>
+              <a:rPr lang="en-US" altLang="ja-JP" sz="2800" b="1" dirty="0"/>
               <a:t>begin</a:t>
             </a:r>
           </a:p>
           <a:p>
             <a:r>
-              <a:rPr lang="en-US" altLang="ja-JP" sz="2800" dirty="0" smtClean="0"/>
+              <a:rPr lang="en-US" altLang="ja-JP" sz="2800" dirty="0"/>
               <a:t>                </a:t>
             </a:r>
             <a:r>
-              <a:rPr lang="en-US" altLang="ja-JP" sz="2800" b="1" dirty="0" smtClean="0"/>
+              <a:rPr lang="en-US" altLang="ja-JP" sz="2800" b="1" dirty="0"/>
               <a:t>if</a:t>
             </a:r>
             <a:r>
-              <a:rPr lang="en-US" altLang="ja-JP" sz="2800" dirty="0" smtClean="0"/>
+              <a:rPr lang="en-US" altLang="ja-JP" sz="2800" dirty="0"/>
               <a:t> x=3 </a:t>
             </a:r>
             <a:r>
-              <a:rPr lang="en-US" altLang="ja-JP" sz="2800" b="1" dirty="0" smtClean="0"/>
+              <a:rPr lang="en-US" altLang="ja-JP" sz="2800" b="1" dirty="0"/>
               <a:t>then</a:t>
             </a:r>
           </a:p>
           <a:p>
             <a:r>
-              <a:rPr kumimoji="1" lang="en-US" altLang="ja-JP" sz="2800" dirty="0" smtClean="0"/>
+              <a:rPr kumimoji="1" lang="en-US" altLang="ja-JP" sz="2800" dirty="0"/>
               <a:t>                    </a:t>
             </a:r>
             <a:r>
-              <a:rPr kumimoji="1" lang="en-US" altLang="ja-JP" sz="2800" b="1" dirty="0" smtClean="0"/>
+              <a:rPr kumimoji="1" lang="en-US" altLang="ja-JP" sz="2800" b="1" dirty="0"/>
               <a:t>break</a:t>
             </a:r>
             <a:r>
-              <a:rPr kumimoji="1" lang="en-US" altLang="ja-JP" sz="2800" dirty="0" smtClean="0"/>
+              <a:rPr kumimoji="1" lang="en-US" altLang="ja-JP" sz="2800" dirty="0"/>
               <a:t>;</a:t>
             </a:r>
           </a:p>
           <a:p>
             <a:r>
-              <a:rPr lang="en-US" altLang="ja-JP" sz="2800" b="1" dirty="0" smtClean="0"/>
+              <a:rPr lang="en-US" altLang="ja-JP" sz="2800" b="1" dirty="0"/>
               <a:t>                </a:t>
             </a:r>
             <a:r>
-              <a:rPr lang="en-US" altLang="ja-JP" sz="2800" dirty="0" smtClean="0"/>
+              <a:rPr lang="en-US" altLang="ja-JP" sz="2800" dirty="0"/>
               <a:t>z := z + 1;</a:t>
             </a:r>
           </a:p>
           <a:p>
             <a:r>
-              <a:rPr kumimoji="1" lang="en-US" altLang="ja-JP" sz="2800" dirty="0" smtClean="0"/>
+              <a:rPr kumimoji="1" lang="en-US" altLang="ja-JP" sz="2800" dirty="0"/>
               <a:t>                y := y - 1</a:t>
             </a:r>
           </a:p>
           <a:p>
             <a:r>
-              <a:rPr kumimoji="1" lang="en-US" altLang="ja-JP" sz="2800" dirty="0" smtClean="0"/>
+              <a:rPr kumimoji="1" lang="en-US" altLang="ja-JP" sz="2800" dirty="0"/>
               <a:t>            </a:t>
             </a:r>
             <a:r>
-              <a:rPr kumimoji="1" lang="en-US" altLang="ja-JP" sz="2800" b="1" dirty="0" smtClean="0"/>
+              <a:rPr kumimoji="1" lang="en-US" altLang="ja-JP" sz="2800" b="1" dirty="0"/>
               <a:t>end</a:t>
             </a:r>
             <a:r>
-              <a:rPr kumimoji="1" lang="en-US" altLang="ja-JP" sz="2800" dirty="0" smtClean="0"/>
+              <a:rPr kumimoji="1" lang="en-US" altLang="ja-JP" sz="2800" dirty="0"/>
               <a:t>;</a:t>
             </a:r>
           </a:p>
           <a:p>
             <a:r>
-              <a:rPr kumimoji="1" lang="en-US" altLang="ja-JP" sz="2800" dirty="0" smtClean="0"/>
+              <a:rPr kumimoji="1" lang="en-US" altLang="ja-JP" sz="2800" dirty="0"/>
               <a:t>        x := x – 1</a:t>
             </a:r>
           </a:p>
           <a:p>
             <a:r>
-              <a:rPr lang="en-US" altLang="ja-JP" sz="2800" dirty="0" smtClean="0"/>
+              <a:rPr lang="en-US" altLang="ja-JP" sz="2800" dirty="0"/>
               <a:t>   </a:t>
             </a:r>
             <a:r>
-              <a:rPr lang="en-US" altLang="ja-JP" sz="2800" b="1" dirty="0" smtClean="0"/>
+              <a:rPr lang="en-US" altLang="ja-JP" sz="2800" b="1" dirty="0"/>
               <a:t> end</a:t>
             </a:r>
             <a:endParaRPr kumimoji="1" lang="ja-JP" altLang="en-US" sz="2800" b="1" dirty="0"/>
@@ -13540,7 +13468,7 @@
           <a:p>
             <a:pPr algn="ctr"/>
             <a:r>
-              <a:rPr lang="en-US" altLang="ja-JP" sz="2800" dirty="0" smtClean="0">
+              <a:rPr lang="en-US" altLang="ja-JP" sz="2800" dirty="0">
                 <a:solidFill>
                   <a:schemeClr val="tx1"/>
                 </a:solidFill>
@@ -13614,7 +13542,7 @@
           <a:lstStyle/>
           <a:p>
             <a:r>
-              <a:rPr kumimoji="1" lang="en-US" altLang="ja-JP" sz="2800" dirty="0" smtClean="0"/>
+              <a:rPr kumimoji="1" lang="en-US" altLang="ja-JP" sz="2800" dirty="0"/>
               <a:t>T</a:t>
             </a:r>
             <a:endParaRPr kumimoji="1" lang="ja-JP" altLang="en-US" sz="2800" dirty="0"/>
@@ -13644,7 +13572,7 @@
           <a:lstStyle/>
           <a:p>
             <a:r>
-              <a:rPr kumimoji="1" lang="en-US" altLang="ja-JP" sz="2800" dirty="0" smtClean="0"/>
+              <a:rPr kumimoji="1" lang="en-US" altLang="ja-JP" sz="2800" dirty="0"/>
               <a:t>F</a:t>
             </a:r>
             <a:endParaRPr kumimoji="1" lang="ja-JP" altLang="en-US" sz="2800" dirty="0"/>
@@ -13674,7 +13602,7 @@
           <a:lstStyle/>
           <a:p>
             <a:r>
-              <a:rPr lang="en-US" altLang="ja-JP" sz="2800" dirty="0" smtClean="0"/>
+              <a:rPr lang="en-US" altLang="ja-JP" sz="2800" dirty="0"/>
               <a:t>  x := x-1</a:t>
             </a:r>
           </a:p>
@@ -13812,7 +13740,7 @@
           <a:lstStyle/>
           <a:p>
             <a:r>
-              <a:rPr lang="ja-JP" altLang="en-US" dirty="0" smtClean="0"/>
+              <a:rPr lang="ja-JP" altLang="en-US" dirty="0"/>
               <a:t>解答例</a:t>
             </a:r>
             <a:endParaRPr kumimoji="1" lang="ja-JP" altLang="en-US" dirty="0"/>
@@ -13862,7 +13790,7 @@
           <a:p>
             <a:pPr algn="ctr"/>
             <a:r>
-              <a:rPr kumimoji="1" lang="en-US" altLang="ja-JP" sz="2800" dirty="0" smtClean="0">
+              <a:rPr kumimoji="1" lang="en-US" altLang="ja-JP" sz="2800" dirty="0">
                 <a:solidFill>
                   <a:schemeClr val="tx1"/>
                 </a:solidFill>
@@ -13900,7 +13828,7 @@
           <a:lstStyle/>
           <a:p>
             <a:r>
-              <a:rPr kumimoji="1" lang="en-US" altLang="ja-JP" sz="2800" dirty="0" smtClean="0"/>
+              <a:rPr kumimoji="1" lang="en-US" altLang="ja-JP" sz="2800" dirty="0"/>
               <a:t>F</a:t>
             </a:r>
             <a:endParaRPr kumimoji="1" lang="ja-JP" altLang="en-US" sz="2800" dirty="0"/>
@@ -13930,7 +13858,7 @@
           <a:lstStyle/>
           <a:p>
             <a:r>
-              <a:rPr kumimoji="1" lang="en-US" altLang="ja-JP" sz="2800" dirty="0" smtClean="0"/>
+              <a:rPr kumimoji="1" lang="en-US" altLang="ja-JP" sz="2800" dirty="0"/>
               <a:t>T</a:t>
             </a:r>
             <a:endParaRPr kumimoji="1" lang="ja-JP" altLang="en-US" sz="2800" dirty="0"/>
@@ -13996,7 +13924,7 @@
           <a:lstStyle/>
           <a:p>
             <a:r>
-              <a:rPr lang="en-US" altLang="ja-JP" sz="2800" dirty="0" smtClean="0"/>
+              <a:rPr lang="en-US" altLang="ja-JP" sz="2800" dirty="0"/>
               <a:t>  z := z+1</a:t>
             </a:r>
           </a:p>
@@ -14059,123 +13987,123 @@
           <a:lstStyle/>
           <a:p>
             <a:r>
-              <a:rPr lang="en-US" altLang="ja-JP" sz="2400" b="1" dirty="0" smtClean="0"/>
+              <a:rPr lang="en-US" altLang="ja-JP" sz="2400" b="1" dirty="0"/>
               <a:t>while</a:t>
             </a:r>
             <a:r>
-              <a:rPr lang="en-US" altLang="ja-JP" sz="2400" dirty="0" smtClean="0"/>
+              <a:rPr lang="en-US" altLang="ja-JP" sz="2400" dirty="0"/>
               <a:t> x&gt;0 </a:t>
             </a:r>
             <a:r>
-              <a:rPr lang="en-US" altLang="ja-JP" sz="2400" b="1" dirty="0" smtClean="0"/>
+              <a:rPr lang="en-US" altLang="ja-JP" sz="2400" b="1" dirty="0"/>
               <a:t>do</a:t>
             </a:r>
           </a:p>
           <a:p>
             <a:r>
-              <a:rPr lang="en-US" altLang="ja-JP" sz="2400" b="1" dirty="0" smtClean="0"/>
+              <a:rPr lang="en-US" altLang="ja-JP" sz="2400" b="1" dirty="0"/>
               <a:t>    begin</a:t>
             </a:r>
           </a:p>
           <a:p>
             <a:r>
-              <a:rPr lang="en-US" altLang="ja-JP" sz="2400" b="1" dirty="0" smtClean="0"/>
+              <a:rPr lang="en-US" altLang="ja-JP" sz="2400" b="1" dirty="0"/>
               <a:t>        while </a:t>
             </a:r>
             <a:r>
-              <a:rPr lang="en-US" altLang="ja-JP" sz="2400" dirty="0" smtClean="0"/>
+              <a:rPr lang="en-US" altLang="ja-JP" sz="2400" dirty="0"/>
               <a:t>y&gt;0</a:t>
             </a:r>
             <a:r>
-              <a:rPr lang="en-US" altLang="ja-JP" sz="2400" b="1" dirty="0" smtClean="0"/>
+              <a:rPr lang="en-US" altLang="ja-JP" sz="2400" b="1" dirty="0"/>
               <a:t> do</a:t>
             </a:r>
           </a:p>
           <a:p>
             <a:r>
-              <a:rPr lang="en-US" altLang="ja-JP" sz="2400" dirty="0" smtClean="0"/>
+              <a:rPr lang="en-US" altLang="ja-JP" sz="2400" dirty="0"/>
               <a:t>            </a:t>
             </a:r>
             <a:r>
-              <a:rPr lang="en-US" altLang="ja-JP" sz="2400" b="1" dirty="0" smtClean="0"/>
+              <a:rPr lang="en-US" altLang="ja-JP" sz="2400" b="1" dirty="0"/>
               <a:t>begin</a:t>
             </a:r>
           </a:p>
           <a:p>
             <a:r>
-              <a:rPr lang="en-US" altLang="ja-JP" sz="2400" dirty="0" smtClean="0"/>
+              <a:rPr lang="en-US" altLang="ja-JP" sz="2400" dirty="0"/>
               <a:t>                </a:t>
             </a:r>
             <a:r>
-              <a:rPr lang="en-US" altLang="ja-JP" sz="2400" b="1" dirty="0" smtClean="0"/>
+              <a:rPr lang="en-US" altLang="ja-JP" sz="2400" b="1" dirty="0"/>
               <a:t>if</a:t>
             </a:r>
             <a:r>
-              <a:rPr lang="en-US" altLang="ja-JP" sz="2400" dirty="0" smtClean="0"/>
+              <a:rPr lang="en-US" altLang="ja-JP" sz="2400" dirty="0"/>
               <a:t> x=3 </a:t>
             </a:r>
             <a:r>
-              <a:rPr lang="en-US" altLang="ja-JP" sz="2400" b="1" dirty="0" smtClean="0"/>
+              <a:rPr lang="en-US" altLang="ja-JP" sz="2400" b="1" dirty="0"/>
               <a:t>then</a:t>
             </a:r>
           </a:p>
           <a:p>
             <a:r>
-              <a:rPr lang="en-US" altLang="ja-JP" sz="2400" dirty="0" smtClean="0"/>
+              <a:rPr lang="en-US" altLang="ja-JP" sz="2400" dirty="0"/>
               <a:t>                    </a:t>
             </a:r>
             <a:r>
-              <a:rPr lang="en-US" altLang="ja-JP" sz="2400" b="1" dirty="0" smtClean="0"/>
+              <a:rPr lang="en-US" altLang="ja-JP" sz="2400" b="1" dirty="0"/>
               <a:t>break</a:t>
             </a:r>
             <a:r>
-              <a:rPr lang="en-US" altLang="ja-JP" sz="2400" dirty="0" smtClean="0"/>
+              <a:rPr lang="en-US" altLang="ja-JP" sz="2400" dirty="0"/>
               <a:t>;</a:t>
             </a:r>
           </a:p>
           <a:p>
             <a:r>
-              <a:rPr lang="en-US" altLang="ja-JP" sz="2400" b="1" dirty="0" smtClean="0"/>
+              <a:rPr lang="en-US" altLang="ja-JP" sz="2400" b="1" dirty="0"/>
               <a:t>                </a:t>
             </a:r>
             <a:r>
-              <a:rPr lang="en-US" altLang="ja-JP" sz="2400" dirty="0" smtClean="0"/>
+              <a:rPr lang="en-US" altLang="ja-JP" sz="2400" dirty="0"/>
               <a:t>z := z + 1;</a:t>
             </a:r>
           </a:p>
           <a:p>
             <a:r>
-              <a:rPr lang="en-US" altLang="ja-JP" sz="2400" dirty="0" smtClean="0"/>
+              <a:rPr lang="en-US" altLang="ja-JP" sz="2400" dirty="0"/>
               <a:t>                y := y - 1</a:t>
             </a:r>
           </a:p>
           <a:p>
             <a:r>
-              <a:rPr lang="en-US" altLang="ja-JP" sz="2400" dirty="0" smtClean="0"/>
+              <a:rPr lang="en-US" altLang="ja-JP" sz="2400" dirty="0"/>
               <a:t>            </a:t>
             </a:r>
             <a:r>
-              <a:rPr lang="en-US" altLang="ja-JP" sz="2400" b="1" dirty="0" smtClean="0"/>
+              <a:rPr lang="en-US" altLang="ja-JP" sz="2400" b="1" dirty="0"/>
               <a:t>end</a:t>
             </a:r>
             <a:r>
-              <a:rPr lang="en-US" altLang="ja-JP" sz="2400" dirty="0" smtClean="0"/>
+              <a:rPr lang="en-US" altLang="ja-JP" sz="2400" dirty="0"/>
               <a:t>;</a:t>
             </a:r>
           </a:p>
           <a:p>
             <a:r>
-              <a:rPr lang="en-US" altLang="ja-JP" sz="2400" dirty="0" smtClean="0"/>
+              <a:rPr lang="en-US" altLang="ja-JP" sz="2400" dirty="0"/>
               <a:t>        x := x – 1</a:t>
             </a:r>
           </a:p>
           <a:p>
             <a:r>
-              <a:rPr lang="en-US" altLang="ja-JP" sz="2400" dirty="0" smtClean="0"/>
+              <a:rPr lang="en-US" altLang="ja-JP" sz="2400" dirty="0"/>
               <a:t>   </a:t>
             </a:r>
             <a:r>
-              <a:rPr lang="en-US" altLang="ja-JP" sz="2400" b="1" dirty="0" smtClean="0"/>
+              <a:rPr lang="en-US" altLang="ja-JP" sz="2400" b="1" dirty="0"/>
               <a:t> end</a:t>
             </a:r>
             <a:endParaRPr lang="ja-JP" altLang="en-US" sz="2400" b="1" dirty="0"/>
@@ -14403,7 +14331,7 @@
           <a:p>
             <a:pPr algn="ctr"/>
             <a:r>
-              <a:rPr kumimoji="1" lang="en-US" altLang="ja-JP" sz="2800" dirty="0" smtClean="0">
+              <a:rPr kumimoji="1" lang="en-US" altLang="ja-JP" sz="2800" dirty="0">
                 <a:solidFill>
                   <a:schemeClr val="tx1"/>
                 </a:solidFill>
@@ -14441,7 +14369,7 @@
           <a:lstStyle/>
           <a:p>
             <a:r>
-              <a:rPr kumimoji="1" lang="en-US" altLang="ja-JP" sz="2800" dirty="0" smtClean="0"/>
+              <a:rPr kumimoji="1" lang="en-US" altLang="ja-JP" sz="2800" dirty="0"/>
               <a:t>F</a:t>
             </a:r>
             <a:endParaRPr kumimoji="1" lang="ja-JP" altLang="en-US" sz="2800" dirty="0"/>
@@ -14471,7 +14399,7 @@
           <a:lstStyle/>
           <a:p>
             <a:r>
-              <a:rPr kumimoji="1" lang="en-US" altLang="ja-JP" sz="2800" dirty="0" smtClean="0"/>
+              <a:rPr kumimoji="1" lang="en-US" altLang="ja-JP" sz="2800" dirty="0"/>
               <a:t>T</a:t>
             </a:r>
             <a:endParaRPr kumimoji="1" lang="ja-JP" altLang="en-US" sz="2800" dirty="0"/>
@@ -14538,7 +14466,7 @@
           <a:lstStyle/>
           <a:p>
             <a:r>
-              <a:rPr lang="en-US" altLang="ja-JP" sz="2800" dirty="0" smtClean="0"/>
+              <a:rPr lang="en-US" altLang="ja-JP" sz="2800" dirty="0"/>
               <a:t>  y := y-1</a:t>
             </a:r>
           </a:p>
